--- a/GPP_ZombieAI_RuijterYannick_2DAE09.pptx
+++ b/GPP_ZombieAI_RuijterYannick_2DAE09.pptx
@@ -7,10 +7,10 @@
   <p:sldIdLst>
     <p:sldId id="256" r:id="rId5"/>
     <p:sldId id="257" r:id="rId6"/>
-    <p:sldId id="260" r:id="rId7"/>
-    <p:sldId id="258" r:id="rId8"/>
-    <p:sldId id="259" r:id="rId9"/>
-    <p:sldId id="262" r:id="rId10"/>
+    <p:sldId id="262" r:id="rId7"/>
+    <p:sldId id="260" r:id="rId8"/>
+    <p:sldId id="258" r:id="rId9"/>
+    <p:sldId id="259" r:id="rId10"/>
     <p:sldId id="261" r:id="rId11"/>
   </p:sldIdLst>
   <p:sldSz cx="12192000" cy="6858000"/>
@@ -3522,10 +3522,10 @@
       </p:sp>
       <p:sp>
         <p:nvSpPr>
-          <p:cNvPr id="3" name="Subtitle 2">
-            <a:extLst>
-              <a:ext uri="{FF2B5EF4-FFF2-40B4-BE49-F238E27FC236}">
-                <a16:creationId xmlns:a16="http://schemas.microsoft.com/office/drawing/2014/main" id="{510651AA-5F60-4B6E-8386-AEA67C018DF4}"/>
+          <p:cNvPr id="5" name="Subtitle 4">
+            <a:extLst>
+              <a:ext uri="{FF2B5EF4-FFF2-40B4-BE49-F238E27FC236}">
+                <a16:creationId xmlns:a16="http://schemas.microsoft.com/office/drawing/2014/main" id="{116E6A58-1AD8-F40E-AD95-46B4CA02DD0E}"/>
               </a:ext>
             </a:extLst>
           </p:cNvPr>
@@ -3542,34 +3542,10 @@
           <a:lstStyle/>
           <a:p>
             <a:r>
-              <a:rPr lang="en-US" i="1" dirty="0">
-                <a:solidFill>
-                  <a:schemeClr val="bg1">
-                    <a:lumMod val="75000"/>
-                  </a:schemeClr>
-                </a:solidFill>
-              </a:rPr>
-              <a:t>Delete all comments after reading</a:t>
-            </a:r>
-          </a:p>
-          <a:p>
-            <a:r>
-              <a:rPr lang="en-US" i="1" dirty="0">
-                <a:solidFill>
-                  <a:schemeClr val="bg1">
-                    <a:lumMod val="75000"/>
-                  </a:schemeClr>
-                </a:solidFill>
-              </a:rPr>
-              <a:t>You are not allowed to add more slides to this presentation</a:t>
-            </a:r>
-            <a:endParaRPr lang="en-BE" i="1" dirty="0">
-              <a:solidFill>
-                <a:schemeClr val="bg1">
-                  <a:lumMod val="75000"/>
-                </a:schemeClr>
-              </a:solidFill>
-            </a:endParaRPr>
+              <a:rPr lang="en-US" dirty="0"/>
+              <a:t>By Yannick</a:t>
+            </a:r>
+            <a:endParaRPr lang="en-BE" dirty="0"/>
           </a:p>
         </p:txBody>
       </p:sp>
@@ -3716,6 +3692,246 @@
           </a:prstGeom>
         </p:spPr>
       </p:pic>
+      <p:pic>
+        <p:nvPicPr>
+          <p:cNvPr id="5" name="Picture 4">
+            <a:extLst>
+              <a:ext uri="{FF2B5EF4-FFF2-40B4-BE49-F238E27FC236}">
+                <a16:creationId xmlns:a16="http://schemas.microsoft.com/office/drawing/2014/main" id="{B44E1317-4697-E1A5-C7DE-4C7F20D27152}"/>
+              </a:ext>
+            </a:extLst>
+          </p:cNvPr>
+          <p:cNvPicPr>
+            <a:picLocks noChangeAspect="1"/>
+          </p:cNvPicPr>
+          <p:nvPr/>
+        </p:nvPicPr>
+        <p:blipFill>
+          <a:blip r:embed="rId3"/>
+          <a:stretch>
+            <a:fillRect/>
+          </a:stretch>
+        </p:blipFill>
+        <p:spPr>
+          <a:xfrm>
+            <a:off x="108587" y="1362946"/>
+            <a:ext cx="3458058" cy="4877481"/>
+          </a:xfrm>
+          <a:prstGeom prst="rect">
+            <a:avLst/>
+          </a:prstGeom>
+        </p:spPr>
+      </p:pic>
+      <p:pic>
+        <p:nvPicPr>
+          <p:cNvPr id="7" name="Picture 6">
+            <a:extLst>
+              <a:ext uri="{FF2B5EF4-FFF2-40B4-BE49-F238E27FC236}">
+                <a16:creationId xmlns:a16="http://schemas.microsoft.com/office/drawing/2014/main" id="{7860A027-BE3E-F547-33A4-4032F6F5ADE6}"/>
+              </a:ext>
+            </a:extLst>
+          </p:cNvPr>
+          <p:cNvPicPr>
+            <a:picLocks noChangeAspect="1"/>
+          </p:cNvPicPr>
+          <p:nvPr/>
+        </p:nvPicPr>
+        <p:blipFill>
+          <a:blip r:embed="rId4"/>
+          <a:stretch>
+            <a:fillRect/>
+          </a:stretch>
+        </p:blipFill>
+        <p:spPr>
+          <a:xfrm>
+            <a:off x="1705001" y="1095283"/>
+            <a:ext cx="3096057" cy="5658640"/>
+          </a:xfrm>
+          <a:prstGeom prst="rect">
+            <a:avLst/>
+          </a:prstGeom>
+        </p:spPr>
+      </p:pic>
+      <p:pic>
+        <p:nvPicPr>
+          <p:cNvPr id="10" name="Picture 9">
+            <a:extLst>
+              <a:ext uri="{FF2B5EF4-FFF2-40B4-BE49-F238E27FC236}">
+                <a16:creationId xmlns:a16="http://schemas.microsoft.com/office/drawing/2014/main" id="{14BD7919-AA73-3759-821D-EAAF1A8EE7EF}"/>
+              </a:ext>
+            </a:extLst>
+          </p:cNvPr>
+          <p:cNvPicPr>
+            <a:picLocks noChangeAspect="1"/>
+          </p:cNvPicPr>
+          <p:nvPr/>
+        </p:nvPicPr>
+        <p:blipFill>
+          <a:blip r:embed="rId5"/>
+          <a:stretch>
+            <a:fillRect/>
+          </a:stretch>
+        </p:blipFill>
+        <p:spPr>
+          <a:xfrm>
+            <a:off x="2222691" y="1162538"/>
+            <a:ext cx="2943636" cy="5382376"/>
+          </a:xfrm>
+          <a:prstGeom prst="rect">
+            <a:avLst/>
+          </a:prstGeom>
+        </p:spPr>
+      </p:pic>
+      <p:pic>
+        <p:nvPicPr>
+          <p:cNvPr id="12" name="Picture 11">
+            <a:extLst>
+              <a:ext uri="{FF2B5EF4-FFF2-40B4-BE49-F238E27FC236}">
+                <a16:creationId xmlns:a16="http://schemas.microsoft.com/office/drawing/2014/main" id="{1980D52F-A7E1-12E4-55D4-CA02894E0D53}"/>
+              </a:ext>
+            </a:extLst>
+          </p:cNvPr>
+          <p:cNvPicPr>
+            <a:picLocks noChangeAspect="1"/>
+          </p:cNvPicPr>
+          <p:nvPr/>
+        </p:nvPicPr>
+        <p:blipFill>
+          <a:blip r:embed="rId6"/>
+          <a:stretch>
+            <a:fillRect/>
+          </a:stretch>
+        </p:blipFill>
+        <p:spPr>
+          <a:xfrm>
+            <a:off x="2829815" y="1110499"/>
+            <a:ext cx="5097515" cy="5382376"/>
+          </a:xfrm>
+          <a:prstGeom prst="rect">
+            <a:avLst/>
+          </a:prstGeom>
+        </p:spPr>
+      </p:pic>
+      <p:pic>
+        <p:nvPicPr>
+          <p:cNvPr id="14" name="Picture 13">
+            <a:extLst>
+              <a:ext uri="{FF2B5EF4-FFF2-40B4-BE49-F238E27FC236}">
+                <a16:creationId xmlns:a16="http://schemas.microsoft.com/office/drawing/2014/main" id="{3446EDDD-68EC-2F6D-EC20-CF3DA3568BCB}"/>
+              </a:ext>
+            </a:extLst>
+          </p:cNvPr>
+          <p:cNvPicPr>
+            <a:picLocks noChangeAspect="1"/>
+          </p:cNvPicPr>
+          <p:nvPr/>
+        </p:nvPicPr>
+        <p:blipFill>
+          <a:blip r:embed="rId7"/>
+          <a:stretch>
+            <a:fillRect/>
+          </a:stretch>
+        </p:blipFill>
+        <p:spPr>
+          <a:xfrm>
+            <a:off x="3782365" y="1626018"/>
+            <a:ext cx="6089714" cy="4461203"/>
+          </a:xfrm>
+          <a:prstGeom prst="rect">
+            <a:avLst/>
+          </a:prstGeom>
+        </p:spPr>
+      </p:pic>
+      <p:pic>
+        <p:nvPicPr>
+          <p:cNvPr id="16" name="Picture 15">
+            <a:extLst>
+              <a:ext uri="{FF2B5EF4-FFF2-40B4-BE49-F238E27FC236}">
+                <a16:creationId xmlns:a16="http://schemas.microsoft.com/office/drawing/2014/main" id="{BFBFA402-29D6-B5C6-C290-B33F7665BFB2}"/>
+              </a:ext>
+            </a:extLst>
+          </p:cNvPr>
+          <p:cNvPicPr>
+            <a:picLocks noChangeAspect="1"/>
+          </p:cNvPicPr>
+          <p:nvPr/>
+        </p:nvPicPr>
+        <p:blipFill>
+          <a:blip r:embed="rId8"/>
+          <a:stretch>
+            <a:fillRect/>
+          </a:stretch>
+        </p:blipFill>
+        <p:spPr>
+          <a:xfrm>
+            <a:off x="5302271" y="1362946"/>
+            <a:ext cx="5087060" cy="5439534"/>
+          </a:xfrm>
+          <a:prstGeom prst="rect">
+            <a:avLst/>
+          </a:prstGeom>
+        </p:spPr>
+      </p:pic>
+      <p:pic>
+        <p:nvPicPr>
+          <p:cNvPr id="18" name="Picture 17">
+            <a:extLst>
+              <a:ext uri="{FF2B5EF4-FFF2-40B4-BE49-F238E27FC236}">
+                <a16:creationId xmlns:a16="http://schemas.microsoft.com/office/drawing/2014/main" id="{93A2014D-6C1D-DE66-048E-AC1F779DE842}"/>
+              </a:ext>
+            </a:extLst>
+          </p:cNvPr>
+          <p:cNvPicPr>
+            <a:picLocks noChangeAspect="1"/>
+          </p:cNvPicPr>
+          <p:nvPr/>
+        </p:nvPicPr>
+        <p:blipFill>
+          <a:blip r:embed="rId9"/>
+          <a:stretch>
+            <a:fillRect/>
+          </a:stretch>
+        </p:blipFill>
+        <p:spPr>
+          <a:xfrm>
+            <a:off x="7533412" y="1360872"/>
+            <a:ext cx="3657546" cy="5184042"/>
+          </a:xfrm>
+          <a:prstGeom prst="rect">
+            <a:avLst/>
+          </a:prstGeom>
+        </p:spPr>
+      </p:pic>
+      <p:pic>
+        <p:nvPicPr>
+          <p:cNvPr id="20" name="Picture 19">
+            <a:extLst>
+              <a:ext uri="{FF2B5EF4-FFF2-40B4-BE49-F238E27FC236}">
+                <a16:creationId xmlns:a16="http://schemas.microsoft.com/office/drawing/2014/main" id="{09A7B0CF-4195-6193-C2BB-3FBDFFB1135A}"/>
+              </a:ext>
+            </a:extLst>
+          </p:cNvPr>
+          <p:cNvPicPr>
+            <a:picLocks noChangeAspect="1"/>
+          </p:cNvPicPr>
+          <p:nvPr/>
+        </p:nvPicPr>
+        <p:blipFill>
+          <a:blip r:embed="rId10"/>
+          <a:stretch>
+            <a:fillRect/>
+          </a:stretch>
+        </p:blipFill>
+        <p:spPr>
+          <a:xfrm>
+            <a:off x="2087225" y="1443563"/>
+            <a:ext cx="8399774" cy="4339681"/>
+          </a:xfrm>
+          <a:prstGeom prst="rect">
+            <a:avLst/>
+          </a:prstGeom>
+        </p:spPr>
+      </p:pic>
     </p:spTree>
     <p:extLst>
       <p:ext uri="{BB962C8B-B14F-4D97-AF65-F5344CB8AC3E}">
@@ -3726,6 +3942,756 @@
   <p:clrMapOvr>
     <a:masterClrMapping/>
   </p:clrMapOvr>
+  <p:timing>
+    <p:tnLst>
+      <p:par>
+        <p:cTn id="1" dur="indefinite" restart="never" nodeType="tmRoot">
+          <p:childTnLst>
+            <p:seq concurrent="1" nextAc="seek">
+              <p:cTn id="2" dur="indefinite" nodeType="mainSeq">
+                <p:childTnLst>
+                  <p:par>
+                    <p:cTn id="3" fill="hold">
+                      <p:stCondLst>
+                        <p:cond delay="indefinite"/>
+                      </p:stCondLst>
+                      <p:childTnLst>
+                        <p:par>
+                          <p:cTn id="4" fill="hold">
+                            <p:stCondLst>
+                              <p:cond delay="0"/>
+                            </p:stCondLst>
+                            <p:childTnLst>
+                              <p:par>
+                                <p:cTn id="5" presetID="1" presetClass="entr" presetSubtype="0" fill="hold" nodeType="clickEffect">
+                                  <p:stCondLst>
+                                    <p:cond delay="0"/>
+                                  </p:stCondLst>
+                                  <p:childTnLst>
+                                    <p:set>
+                                      <p:cBhvr>
+                                        <p:cTn id="6" dur="1" fill="hold">
+                                          <p:stCondLst>
+                                            <p:cond delay="0"/>
+                                          </p:stCondLst>
+                                        </p:cTn>
+                                        <p:tgtEl>
+                                          <p:spTgt spid="5"/>
+                                        </p:tgtEl>
+                                        <p:attrNameLst>
+                                          <p:attrName>style.visibility</p:attrName>
+                                        </p:attrNameLst>
+                                      </p:cBhvr>
+                                      <p:to>
+                                        <p:strVal val="visible"/>
+                                      </p:to>
+                                    </p:set>
+                                  </p:childTnLst>
+                                </p:cTn>
+                              </p:par>
+                            </p:childTnLst>
+                          </p:cTn>
+                        </p:par>
+                      </p:childTnLst>
+                    </p:cTn>
+                  </p:par>
+                  <p:par>
+                    <p:cTn id="7" fill="hold">
+                      <p:stCondLst>
+                        <p:cond delay="indefinite"/>
+                      </p:stCondLst>
+                      <p:childTnLst>
+                        <p:par>
+                          <p:cTn id="8" fill="hold">
+                            <p:stCondLst>
+                              <p:cond delay="0"/>
+                            </p:stCondLst>
+                            <p:childTnLst>
+                              <p:par>
+                                <p:cTn id="9" presetID="1" presetClass="exit" presetSubtype="0" fill="hold" nodeType="clickEffect">
+                                  <p:stCondLst>
+                                    <p:cond delay="0"/>
+                                  </p:stCondLst>
+                                  <p:childTnLst>
+                                    <p:set>
+                                      <p:cBhvr>
+                                        <p:cTn id="10" dur="1" fill="hold">
+                                          <p:stCondLst>
+                                            <p:cond delay="0"/>
+                                          </p:stCondLst>
+                                        </p:cTn>
+                                        <p:tgtEl>
+                                          <p:spTgt spid="5"/>
+                                        </p:tgtEl>
+                                        <p:attrNameLst>
+                                          <p:attrName>style.visibility</p:attrName>
+                                        </p:attrNameLst>
+                                      </p:cBhvr>
+                                      <p:to>
+                                        <p:strVal val="hidden"/>
+                                      </p:to>
+                                    </p:set>
+                                  </p:childTnLst>
+                                </p:cTn>
+                              </p:par>
+                            </p:childTnLst>
+                          </p:cTn>
+                        </p:par>
+                      </p:childTnLst>
+                    </p:cTn>
+                  </p:par>
+                  <p:par>
+                    <p:cTn id="11" fill="hold">
+                      <p:stCondLst>
+                        <p:cond delay="indefinite"/>
+                      </p:stCondLst>
+                      <p:childTnLst>
+                        <p:par>
+                          <p:cTn id="12" fill="hold">
+                            <p:stCondLst>
+                              <p:cond delay="0"/>
+                            </p:stCondLst>
+                            <p:childTnLst>
+                              <p:par>
+                                <p:cTn id="13" presetID="1" presetClass="entr" presetSubtype="0" fill="hold" nodeType="clickEffect">
+                                  <p:stCondLst>
+                                    <p:cond delay="0"/>
+                                  </p:stCondLst>
+                                  <p:childTnLst>
+                                    <p:set>
+                                      <p:cBhvr>
+                                        <p:cTn id="14" dur="1" fill="hold">
+                                          <p:stCondLst>
+                                            <p:cond delay="0"/>
+                                          </p:stCondLst>
+                                        </p:cTn>
+                                        <p:tgtEl>
+                                          <p:spTgt spid="7"/>
+                                        </p:tgtEl>
+                                        <p:attrNameLst>
+                                          <p:attrName>style.visibility</p:attrName>
+                                        </p:attrNameLst>
+                                      </p:cBhvr>
+                                      <p:to>
+                                        <p:strVal val="visible"/>
+                                      </p:to>
+                                    </p:set>
+                                  </p:childTnLst>
+                                </p:cTn>
+                              </p:par>
+                            </p:childTnLst>
+                          </p:cTn>
+                        </p:par>
+                      </p:childTnLst>
+                    </p:cTn>
+                  </p:par>
+                  <p:par>
+                    <p:cTn id="15" fill="hold">
+                      <p:stCondLst>
+                        <p:cond delay="indefinite"/>
+                      </p:stCondLst>
+                      <p:childTnLst>
+                        <p:par>
+                          <p:cTn id="16" fill="hold">
+                            <p:stCondLst>
+                              <p:cond delay="0"/>
+                            </p:stCondLst>
+                            <p:childTnLst>
+                              <p:par>
+                                <p:cTn id="17" presetID="1" presetClass="exit" presetSubtype="0" fill="hold" nodeType="clickEffect">
+                                  <p:stCondLst>
+                                    <p:cond delay="0"/>
+                                  </p:stCondLst>
+                                  <p:childTnLst>
+                                    <p:set>
+                                      <p:cBhvr>
+                                        <p:cTn id="18" dur="1" fill="hold">
+                                          <p:stCondLst>
+                                            <p:cond delay="0"/>
+                                          </p:stCondLst>
+                                        </p:cTn>
+                                        <p:tgtEl>
+                                          <p:spTgt spid="7"/>
+                                        </p:tgtEl>
+                                        <p:attrNameLst>
+                                          <p:attrName>style.visibility</p:attrName>
+                                        </p:attrNameLst>
+                                      </p:cBhvr>
+                                      <p:to>
+                                        <p:strVal val="hidden"/>
+                                      </p:to>
+                                    </p:set>
+                                  </p:childTnLst>
+                                </p:cTn>
+                              </p:par>
+                            </p:childTnLst>
+                          </p:cTn>
+                        </p:par>
+                      </p:childTnLst>
+                    </p:cTn>
+                  </p:par>
+                  <p:par>
+                    <p:cTn id="19" fill="hold">
+                      <p:stCondLst>
+                        <p:cond delay="indefinite"/>
+                      </p:stCondLst>
+                      <p:childTnLst>
+                        <p:par>
+                          <p:cTn id="20" fill="hold">
+                            <p:stCondLst>
+                              <p:cond delay="0"/>
+                            </p:stCondLst>
+                            <p:childTnLst>
+                              <p:par>
+                                <p:cTn id="21" presetID="1" presetClass="entr" presetSubtype="0" fill="hold" nodeType="clickEffect">
+                                  <p:stCondLst>
+                                    <p:cond delay="0"/>
+                                  </p:stCondLst>
+                                  <p:childTnLst>
+                                    <p:set>
+                                      <p:cBhvr>
+                                        <p:cTn id="22" dur="1" fill="hold">
+                                          <p:stCondLst>
+                                            <p:cond delay="0"/>
+                                          </p:stCondLst>
+                                        </p:cTn>
+                                        <p:tgtEl>
+                                          <p:spTgt spid="10"/>
+                                        </p:tgtEl>
+                                        <p:attrNameLst>
+                                          <p:attrName>style.visibility</p:attrName>
+                                        </p:attrNameLst>
+                                      </p:cBhvr>
+                                      <p:to>
+                                        <p:strVal val="visible"/>
+                                      </p:to>
+                                    </p:set>
+                                  </p:childTnLst>
+                                </p:cTn>
+                              </p:par>
+                            </p:childTnLst>
+                          </p:cTn>
+                        </p:par>
+                      </p:childTnLst>
+                    </p:cTn>
+                  </p:par>
+                  <p:par>
+                    <p:cTn id="23" fill="hold">
+                      <p:stCondLst>
+                        <p:cond delay="indefinite"/>
+                      </p:stCondLst>
+                      <p:childTnLst>
+                        <p:par>
+                          <p:cTn id="24" fill="hold">
+                            <p:stCondLst>
+                              <p:cond delay="0"/>
+                            </p:stCondLst>
+                            <p:childTnLst>
+                              <p:par>
+                                <p:cTn id="25" presetID="1" presetClass="exit" presetSubtype="0" fill="hold" nodeType="clickEffect">
+                                  <p:stCondLst>
+                                    <p:cond delay="0"/>
+                                  </p:stCondLst>
+                                  <p:childTnLst>
+                                    <p:set>
+                                      <p:cBhvr>
+                                        <p:cTn id="26" dur="1" fill="hold">
+                                          <p:stCondLst>
+                                            <p:cond delay="0"/>
+                                          </p:stCondLst>
+                                        </p:cTn>
+                                        <p:tgtEl>
+                                          <p:spTgt spid="10"/>
+                                        </p:tgtEl>
+                                        <p:attrNameLst>
+                                          <p:attrName>style.visibility</p:attrName>
+                                        </p:attrNameLst>
+                                      </p:cBhvr>
+                                      <p:to>
+                                        <p:strVal val="hidden"/>
+                                      </p:to>
+                                    </p:set>
+                                  </p:childTnLst>
+                                </p:cTn>
+                              </p:par>
+                            </p:childTnLst>
+                          </p:cTn>
+                        </p:par>
+                      </p:childTnLst>
+                    </p:cTn>
+                  </p:par>
+                  <p:par>
+                    <p:cTn id="27" fill="hold">
+                      <p:stCondLst>
+                        <p:cond delay="indefinite"/>
+                      </p:stCondLst>
+                      <p:childTnLst>
+                        <p:par>
+                          <p:cTn id="28" fill="hold">
+                            <p:stCondLst>
+                              <p:cond delay="0"/>
+                            </p:stCondLst>
+                            <p:childTnLst>
+                              <p:par>
+                                <p:cTn id="29" presetID="1" presetClass="entr" presetSubtype="0" fill="hold" nodeType="clickEffect">
+                                  <p:stCondLst>
+                                    <p:cond delay="0"/>
+                                  </p:stCondLst>
+                                  <p:childTnLst>
+                                    <p:set>
+                                      <p:cBhvr>
+                                        <p:cTn id="30" dur="1" fill="hold">
+                                          <p:stCondLst>
+                                            <p:cond delay="0"/>
+                                          </p:stCondLst>
+                                        </p:cTn>
+                                        <p:tgtEl>
+                                          <p:spTgt spid="12"/>
+                                        </p:tgtEl>
+                                        <p:attrNameLst>
+                                          <p:attrName>style.visibility</p:attrName>
+                                        </p:attrNameLst>
+                                      </p:cBhvr>
+                                      <p:to>
+                                        <p:strVal val="visible"/>
+                                      </p:to>
+                                    </p:set>
+                                  </p:childTnLst>
+                                </p:cTn>
+                              </p:par>
+                            </p:childTnLst>
+                          </p:cTn>
+                        </p:par>
+                      </p:childTnLst>
+                    </p:cTn>
+                  </p:par>
+                  <p:par>
+                    <p:cTn id="31" fill="hold">
+                      <p:stCondLst>
+                        <p:cond delay="indefinite"/>
+                      </p:stCondLst>
+                      <p:childTnLst>
+                        <p:par>
+                          <p:cTn id="32" fill="hold">
+                            <p:stCondLst>
+                              <p:cond delay="0"/>
+                            </p:stCondLst>
+                            <p:childTnLst>
+                              <p:par>
+                                <p:cTn id="33" presetID="1" presetClass="exit" presetSubtype="0" fill="hold" nodeType="clickEffect">
+                                  <p:stCondLst>
+                                    <p:cond delay="0"/>
+                                  </p:stCondLst>
+                                  <p:childTnLst>
+                                    <p:set>
+                                      <p:cBhvr>
+                                        <p:cTn id="34" dur="1" fill="hold">
+                                          <p:stCondLst>
+                                            <p:cond delay="0"/>
+                                          </p:stCondLst>
+                                        </p:cTn>
+                                        <p:tgtEl>
+                                          <p:spTgt spid="12"/>
+                                        </p:tgtEl>
+                                        <p:attrNameLst>
+                                          <p:attrName>style.visibility</p:attrName>
+                                        </p:attrNameLst>
+                                      </p:cBhvr>
+                                      <p:to>
+                                        <p:strVal val="hidden"/>
+                                      </p:to>
+                                    </p:set>
+                                  </p:childTnLst>
+                                </p:cTn>
+                              </p:par>
+                            </p:childTnLst>
+                          </p:cTn>
+                        </p:par>
+                      </p:childTnLst>
+                    </p:cTn>
+                  </p:par>
+                  <p:par>
+                    <p:cTn id="35" fill="hold">
+                      <p:stCondLst>
+                        <p:cond delay="indefinite"/>
+                      </p:stCondLst>
+                      <p:childTnLst>
+                        <p:par>
+                          <p:cTn id="36" fill="hold">
+                            <p:stCondLst>
+                              <p:cond delay="0"/>
+                            </p:stCondLst>
+                            <p:childTnLst>
+                              <p:par>
+                                <p:cTn id="37" presetID="1" presetClass="entr" presetSubtype="0" fill="hold" nodeType="clickEffect">
+                                  <p:stCondLst>
+                                    <p:cond delay="0"/>
+                                  </p:stCondLst>
+                                  <p:childTnLst>
+                                    <p:set>
+                                      <p:cBhvr>
+                                        <p:cTn id="38" dur="1" fill="hold">
+                                          <p:stCondLst>
+                                            <p:cond delay="0"/>
+                                          </p:stCondLst>
+                                        </p:cTn>
+                                        <p:tgtEl>
+                                          <p:spTgt spid="14"/>
+                                        </p:tgtEl>
+                                        <p:attrNameLst>
+                                          <p:attrName>style.visibility</p:attrName>
+                                        </p:attrNameLst>
+                                      </p:cBhvr>
+                                      <p:to>
+                                        <p:strVal val="visible"/>
+                                      </p:to>
+                                    </p:set>
+                                  </p:childTnLst>
+                                </p:cTn>
+                              </p:par>
+                            </p:childTnLst>
+                          </p:cTn>
+                        </p:par>
+                      </p:childTnLst>
+                    </p:cTn>
+                  </p:par>
+                  <p:par>
+                    <p:cTn id="39" fill="hold">
+                      <p:stCondLst>
+                        <p:cond delay="indefinite"/>
+                      </p:stCondLst>
+                      <p:childTnLst>
+                        <p:par>
+                          <p:cTn id="40" fill="hold">
+                            <p:stCondLst>
+                              <p:cond delay="0"/>
+                            </p:stCondLst>
+                            <p:childTnLst>
+                              <p:par>
+                                <p:cTn id="41" presetID="1" presetClass="exit" presetSubtype="0" fill="hold" nodeType="clickEffect">
+                                  <p:stCondLst>
+                                    <p:cond delay="0"/>
+                                  </p:stCondLst>
+                                  <p:childTnLst>
+                                    <p:set>
+                                      <p:cBhvr>
+                                        <p:cTn id="42" dur="1" fill="hold">
+                                          <p:stCondLst>
+                                            <p:cond delay="0"/>
+                                          </p:stCondLst>
+                                        </p:cTn>
+                                        <p:tgtEl>
+                                          <p:spTgt spid="14"/>
+                                        </p:tgtEl>
+                                        <p:attrNameLst>
+                                          <p:attrName>style.visibility</p:attrName>
+                                        </p:attrNameLst>
+                                      </p:cBhvr>
+                                      <p:to>
+                                        <p:strVal val="hidden"/>
+                                      </p:to>
+                                    </p:set>
+                                  </p:childTnLst>
+                                </p:cTn>
+                              </p:par>
+                            </p:childTnLst>
+                          </p:cTn>
+                        </p:par>
+                      </p:childTnLst>
+                    </p:cTn>
+                  </p:par>
+                  <p:par>
+                    <p:cTn id="43" fill="hold">
+                      <p:stCondLst>
+                        <p:cond delay="indefinite"/>
+                      </p:stCondLst>
+                      <p:childTnLst>
+                        <p:par>
+                          <p:cTn id="44" fill="hold">
+                            <p:stCondLst>
+                              <p:cond delay="0"/>
+                            </p:stCondLst>
+                            <p:childTnLst>
+                              <p:par>
+                                <p:cTn id="45" presetID="1" presetClass="entr" presetSubtype="0" fill="hold" nodeType="clickEffect">
+                                  <p:stCondLst>
+                                    <p:cond delay="0"/>
+                                  </p:stCondLst>
+                                  <p:childTnLst>
+                                    <p:set>
+                                      <p:cBhvr>
+                                        <p:cTn id="46" dur="1" fill="hold">
+                                          <p:stCondLst>
+                                            <p:cond delay="0"/>
+                                          </p:stCondLst>
+                                        </p:cTn>
+                                        <p:tgtEl>
+                                          <p:spTgt spid="16"/>
+                                        </p:tgtEl>
+                                        <p:attrNameLst>
+                                          <p:attrName>style.visibility</p:attrName>
+                                        </p:attrNameLst>
+                                      </p:cBhvr>
+                                      <p:to>
+                                        <p:strVal val="visible"/>
+                                      </p:to>
+                                    </p:set>
+                                  </p:childTnLst>
+                                </p:cTn>
+                              </p:par>
+                            </p:childTnLst>
+                          </p:cTn>
+                        </p:par>
+                      </p:childTnLst>
+                    </p:cTn>
+                  </p:par>
+                  <p:par>
+                    <p:cTn id="47" fill="hold">
+                      <p:stCondLst>
+                        <p:cond delay="indefinite"/>
+                      </p:stCondLst>
+                      <p:childTnLst>
+                        <p:par>
+                          <p:cTn id="48" fill="hold">
+                            <p:stCondLst>
+                              <p:cond delay="0"/>
+                            </p:stCondLst>
+                            <p:childTnLst>
+                              <p:par>
+                                <p:cTn id="49" presetID="1" presetClass="exit" presetSubtype="0" fill="hold" nodeType="clickEffect">
+                                  <p:stCondLst>
+                                    <p:cond delay="0"/>
+                                  </p:stCondLst>
+                                  <p:childTnLst>
+                                    <p:set>
+                                      <p:cBhvr>
+                                        <p:cTn id="50" dur="1" fill="hold">
+                                          <p:stCondLst>
+                                            <p:cond delay="0"/>
+                                          </p:stCondLst>
+                                        </p:cTn>
+                                        <p:tgtEl>
+                                          <p:spTgt spid="16"/>
+                                        </p:tgtEl>
+                                        <p:attrNameLst>
+                                          <p:attrName>style.visibility</p:attrName>
+                                        </p:attrNameLst>
+                                      </p:cBhvr>
+                                      <p:to>
+                                        <p:strVal val="hidden"/>
+                                      </p:to>
+                                    </p:set>
+                                  </p:childTnLst>
+                                </p:cTn>
+                              </p:par>
+                            </p:childTnLst>
+                          </p:cTn>
+                        </p:par>
+                      </p:childTnLst>
+                    </p:cTn>
+                  </p:par>
+                  <p:par>
+                    <p:cTn id="51" fill="hold">
+                      <p:stCondLst>
+                        <p:cond delay="indefinite"/>
+                      </p:stCondLst>
+                      <p:childTnLst>
+                        <p:par>
+                          <p:cTn id="52" fill="hold">
+                            <p:stCondLst>
+                              <p:cond delay="0"/>
+                            </p:stCondLst>
+                            <p:childTnLst>
+                              <p:par>
+                                <p:cTn id="53" presetID="1" presetClass="entr" presetSubtype="0" fill="hold" nodeType="clickEffect">
+                                  <p:stCondLst>
+                                    <p:cond delay="0"/>
+                                  </p:stCondLst>
+                                  <p:childTnLst>
+                                    <p:set>
+                                      <p:cBhvr>
+                                        <p:cTn id="54" dur="1" fill="hold">
+                                          <p:stCondLst>
+                                            <p:cond delay="0"/>
+                                          </p:stCondLst>
+                                        </p:cTn>
+                                        <p:tgtEl>
+                                          <p:spTgt spid="18"/>
+                                        </p:tgtEl>
+                                        <p:attrNameLst>
+                                          <p:attrName>style.visibility</p:attrName>
+                                        </p:attrNameLst>
+                                      </p:cBhvr>
+                                      <p:to>
+                                        <p:strVal val="visible"/>
+                                      </p:to>
+                                    </p:set>
+                                  </p:childTnLst>
+                                </p:cTn>
+                              </p:par>
+                            </p:childTnLst>
+                          </p:cTn>
+                        </p:par>
+                      </p:childTnLst>
+                    </p:cTn>
+                  </p:par>
+                  <p:par>
+                    <p:cTn id="55" fill="hold">
+                      <p:stCondLst>
+                        <p:cond delay="indefinite"/>
+                      </p:stCondLst>
+                      <p:childTnLst>
+                        <p:par>
+                          <p:cTn id="56" fill="hold">
+                            <p:stCondLst>
+                              <p:cond delay="0"/>
+                            </p:stCondLst>
+                            <p:childTnLst>
+                              <p:par>
+                                <p:cTn id="57" presetID="1" presetClass="exit" presetSubtype="0" fill="hold" nodeType="clickEffect">
+                                  <p:stCondLst>
+                                    <p:cond delay="0"/>
+                                  </p:stCondLst>
+                                  <p:childTnLst>
+                                    <p:set>
+                                      <p:cBhvr>
+                                        <p:cTn id="58" dur="1" fill="hold">
+                                          <p:stCondLst>
+                                            <p:cond delay="0"/>
+                                          </p:stCondLst>
+                                        </p:cTn>
+                                        <p:tgtEl>
+                                          <p:spTgt spid="18"/>
+                                        </p:tgtEl>
+                                        <p:attrNameLst>
+                                          <p:attrName>style.visibility</p:attrName>
+                                        </p:attrNameLst>
+                                      </p:cBhvr>
+                                      <p:to>
+                                        <p:strVal val="hidden"/>
+                                      </p:to>
+                                    </p:set>
+                                  </p:childTnLst>
+                                </p:cTn>
+                              </p:par>
+                            </p:childTnLst>
+                          </p:cTn>
+                        </p:par>
+                      </p:childTnLst>
+                    </p:cTn>
+                  </p:par>
+                  <p:par>
+                    <p:cTn id="59" fill="hold">
+                      <p:stCondLst>
+                        <p:cond delay="indefinite"/>
+                      </p:stCondLst>
+                      <p:childTnLst>
+                        <p:par>
+                          <p:cTn id="60" fill="hold">
+                            <p:stCondLst>
+                              <p:cond delay="0"/>
+                            </p:stCondLst>
+                            <p:childTnLst>
+                              <p:par>
+                                <p:cTn id="61" presetID="1" presetClass="entr" presetSubtype="0" fill="hold" nodeType="clickEffect">
+                                  <p:stCondLst>
+                                    <p:cond delay="0"/>
+                                  </p:stCondLst>
+                                  <p:childTnLst>
+                                    <p:set>
+                                      <p:cBhvr>
+                                        <p:cTn id="62" dur="1" fill="hold">
+                                          <p:stCondLst>
+                                            <p:cond delay="0"/>
+                                          </p:stCondLst>
+                                        </p:cTn>
+                                        <p:tgtEl>
+                                          <p:spTgt spid="20"/>
+                                        </p:tgtEl>
+                                        <p:attrNameLst>
+                                          <p:attrName>style.visibility</p:attrName>
+                                        </p:attrNameLst>
+                                      </p:cBhvr>
+                                      <p:to>
+                                        <p:strVal val="visible"/>
+                                      </p:to>
+                                    </p:set>
+                                  </p:childTnLst>
+                                </p:cTn>
+                              </p:par>
+                            </p:childTnLst>
+                          </p:cTn>
+                        </p:par>
+                      </p:childTnLst>
+                    </p:cTn>
+                  </p:par>
+                  <p:par>
+                    <p:cTn id="63" fill="hold">
+                      <p:stCondLst>
+                        <p:cond delay="indefinite"/>
+                      </p:stCondLst>
+                      <p:childTnLst>
+                        <p:par>
+                          <p:cTn id="64" fill="hold">
+                            <p:stCondLst>
+                              <p:cond delay="0"/>
+                            </p:stCondLst>
+                            <p:childTnLst>
+                              <p:par>
+                                <p:cTn id="65" presetID="1" presetClass="exit" presetSubtype="0" fill="hold" nodeType="clickEffect">
+                                  <p:stCondLst>
+                                    <p:cond delay="0"/>
+                                  </p:stCondLst>
+                                  <p:childTnLst>
+                                    <p:set>
+                                      <p:cBhvr>
+                                        <p:cTn id="66" dur="1" fill="hold">
+                                          <p:stCondLst>
+                                            <p:cond delay="0"/>
+                                          </p:stCondLst>
+                                        </p:cTn>
+                                        <p:tgtEl>
+                                          <p:spTgt spid="20"/>
+                                        </p:tgtEl>
+                                        <p:attrNameLst>
+                                          <p:attrName>style.visibility</p:attrName>
+                                        </p:attrNameLst>
+                                      </p:cBhvr>
+                                      <p:to>
+                                        <p:strVal val="hidden"/>
+                                      </p:to>
+                                    </p:set>
+                                  </p:childTnLst>
+                                </p:cTn>
+                              </p:par>
+                            </p:childTnLst>
+                          </p:cTn>
+                        </p:par>
+                      </p:childTnLst>
+                    </p:cTn>
+                  </p:par>
+                </p:childTnLst>
+              </p:cTn>
+              <p:prevCondLst>
+                <p:cond evt="onPrev" delay="0">
+                  <p:tgtEl>
+                    <p:sldTgt/>
+                  </p:tgtEl>
+                </p:cond>
+              </p:prevCondLst>
+              <p:nextCondLst>
+                <p:cond evt="onNext" delay="0">
+                  <p:tgtEl>
+                    <p:sldTgt/>
+                  </p:tgtEl>
+                </p:cond>
+              </p:nextCondLst>
+            </p:seq>
+          </p:childTnLst>
+        </p:cTn>
+      </p:par>
+    </p:tnLst>
+  </p:timing>
 </p:sld>
 </file>
 
@@ -3768,10 +4734,10 @@
           <a:lstStyle/>
           <a:p>
             <a:r>
-              <a:rPr lang="en-US"/>
-              <a:t>Enemy handling</a:t>
-            </a:r>
-            <a:endParaRPr lang="en-BE"/>
+              <a:rPr lang="en-US" dirty="0"/>
+              <a:t>Movement - Exploration</a:t>
+            </a:r>
+            <a:endParaRPr lang="en-BE" dirty="0"/>
           </a:p>
         </p:txBody>
       </p:sp>
@@ -3797,48 +4763,1725 @@
           <a:lstStyle/>
           <a:p>
             <a:r>
-              <a:rPr lang="en-US" i="1">
+              <a:rPr lang="en-US" dirty="0"/>
+              <a:t>Finding houses</a:t>
+            </a:r>
+          </a:p>
+          <a:p>
+            <a:r>
+              <a:rPr lang="en-US" dirty="0"/>
+              <a:t>Exploring houses</a:t>
+            </a:r>
+          </a:p>
+          <a:p>
+            <a:r>
+              <a:rPr lang="en-US" dirty="0"/>
+              <a:t>Storing houses</a:t>
+            </a:r>
+          </a:p>
+        </p:txBody>
+      </p:sp>
+      <p:sp>
+        <p:nvSpPr>
+          <p:cNvPr id="5" name="Rectangle 4">
+            <a:extLst>
+              <a:ext uri="{FF2B5EF4-FFF2-40B4-BE49-F238E27FC236}">
+                <a16:creationId xmlns:a16="http://schemas.microsoft.com/office/drawing/2014/main" id="{253DE340-CC2F-C184-A851-927E50F67CE7}"/>
+              </a:ext>
+            </a:extLst>
+          </p:cNvPr>
+          <p:cNvSpPr/>
+          <p:nvPr/>
+        </p:nvSpPr>
+        <p:spPr>
+          <a:xfrm>
+            <a:off x="560832" y="1290674"/>
+            <a:ext cx="11539728" cy="5376672"/>
+          </a:xfrm>
+          <a:prstGeom prst="rect">
+            <a:avLst/>
+          </a:prstGeom>
+          <a:solidFill>
+            <a:schemeClr val="bg1"/>
+          </a:solidFill>
+          <a:ln>
+            <a:solidFill>
+              <a:schemeClr val="bg1"/>
+            </a:solidFill>
+          </a:ln>
+        </p:spPr>
+        <p:style>
+          <a:lnRef idx="2">
+            <a:schemeClr val="accent1">
+              <a:shade val="15000"/>
+            </a:schemeClr>
+          </a:lnRef>
+          <a:fillRef idx="1">
+            <a:schemeClr val="accent1"/>
+          </a:fillRef>
+          <a:effectRef idx="0">
+            <a:schemeClr val="accent1"/>
+          </a:effectRef>
+          <a:fontRef idx="minor">
+            <a:schemeClr val="lt1"/>
+          </a:fontRef>
+        </p:style>
+        <p:txBody>
+          <a:bodyPr rtlCol="0" anchor="ctr"/>
+          <a:lstStyle/>
+          <a:p>
+            <a:pPr algn="ctr"/>
+            <a:endParaRPr lang="en-BE"/>
+          </a:p>
+        </p:txBody>
+      </p:sp>
+      <p:pic>
+        <p:nvPicPr>
+          <p:cNvPr id="4" name="Picture 3" descr="Clipart - square spiral">
+            <a:extLst>
+              <a:ext uri="{FF2B5EF4-FFF2-40B4-BE49-F238E27FC236}">
+                <a16:creationId xmlns:a16="http://schemas.microsoft.com/office/drawing/2014/main" id="{D02B3E32-38D7-72AE-87C9-F8CCBDBB2695}"/>
+              </a:ext>
+            </a:extLst>
+          </p:cNvPr>
+          <p:cNvPicPr>
+            <a:picLocks noChangeAspect="1"/>
+          </p:cNvPicPr>
+          <p:nvPr/>
+        </p:nvPicPr>
+        <p:blipFill>
+          <a:blip r:embed="rId4"/>
+          <a:stretch>
+            <a:fillRect/>
+          </a:stretch>
+        </p:blipFill>
+        <p:spPr>
+          <a:xfrm>
+            <a:off x="7377904" y="1825625"/>
+            <a:ext cx="3741701" cy="3741701"/>
+          </a:xfrm>
+          <a:prstGeom prst="rect">
+            <a:avLst/>
+          </a:prstGeom>
+        </p:spPr>
+      </p:pic>
+      <p:sp>
+        <p:nvSpPr>
+          <p:cNvPr id="6" name="TextBox 5">
+            <a:extLst>
+              <a:ext uri="{FF2B5EF4-FFF2-40B4-BE49-F238E27FC236}">
+                <a16:creationId xmlns:a16="http://schemas.microsoft.com/office/drawing/2014/main" id="{3FED9FC7-727F-72C8-C37E-FF4678DDAB3A}"/>
+              </a:ext>
+            </a:extLst>
+          </p:cNvPr>
+          <p:cNvSpPr txBox="1"/>
+          <p:nvPr/>
+        </p:nvSpPr>
+        <p:spPr>
+          <a:xfrm>
+            <a:off x="969264" y="1545336"/>
+            <a:ext cx="5422392" cy="4031873"/>
+          </a:xfrm>
+          <a:prstGeom prst="rect">
+            <a:avLst/>
+          </a:prstGeom>
+          <a:noFill/>
+        </p:spPr>
+        <p:txBody>
+          <a:bodyPr wrap="square" rtlCol="0">
+            <a:spAutoFit/>
+          </a:bodyPr>
+          <a:lstStyle/>
+          <a:p>
+            <a:r>
+              <a:rPr lang="en-US" sz="3200" dirty="0"/>
+              <a:t>Finding houses</a:t>
+            </a:r>
+          </a:p>
+          <a:p>
+            <a:r>
+              <a:rPr lang="en-US" sz="3200" dirty="0">
                 <a:solidFill>
-                  <a:schemeClr val="bg1">
-                    <a:lumMod val="75000"/>
-                  </a:schemeClr>
+                  <a:srgbClr val="C00000"/>
                 </a:solidFill>
               </a:rPr>
-              <a:t>How does your agent deal with enemies (aiming, shooting, item usage, avoidance, hiding, usage of sprint, …)?</a:t>
-            </a:r>
-            <a:endParaRPr lang="en-BE" i="1">
+              <a:t>-Get random location on map</a:t>
+            </a:r>
+          </a:p>
+          <a:p>
+            <a:r>
+              <a:rPr lang="en-US" sz="3200" dirty="0">
+                <a:solidFill>
+                  <a:srgbClr val="C00000"/>
+                </a:solidFill>
+              </a:rPr>
+              <a:t>-Go to location</a:t>
+            </a:r>
+          </a:p>
+          <a:p>
+            <a:endParaRPr lang="en-US" sz="3200" dirty="0">
               <a:solidFill>
-                <a:schemeClr val="bg1">
-                  <a:lumMod val="75000"/>
-                </a:schemeClr>
+                <a:srgbClr val="C00000"/>
               </a:solidFill>
             </a:endParaRPr>
           </a:p>
           <a:p>
             <a:r>
-              <a:rPr lang="en-US" i="1">
+              <a:rPr lang="en-US" sz="3200" dirty="0">
                 <a:solidFill>
-                  <a:schemeClr val="bg1">
-                    <a:lumMod val="75000"/>
-                  </a:schemeClr>
+                  <a:schemeClr val="accent6"/>
                 </a:solidFill>
               </a:rPr>
-              <a:t>USE IMAGES/GIFS</a:t>
-            </a:r>
-            <a:endParaRPr lang="en-BE"/>
+              <a:t>-Base direction &amp; Location</a:t>
+            </a:r>
+          </a:p>
+          <a:p>
+            <a:r>
+              <a:rPr lang="en-US" sz="3200" dirty="0">
+                <a:solidFill>
+                  <a:schemeClr val="accent6"/>
+                </a:solidFill>
+              </a:rPr>
+              <a:t>-Rotate left</a:t>
+            </a:r>
+          </a:p>
+          <a:p>
+            <a:r>
+              <a:rPr lang="en-US" sz="3200" dirty="0">
+                <a:solidFill>
+                  <a:schemeClr val="accent6"/>
+                </a:solidFill>
+              </a:rPr>
+              <a:t>-Add side length</a:t>
+            </a:r>
+          </a:p>
+          <a:p>
+            <a:r>
+              <a:rPr lang="en-US" sz="3200" dirty="0">
+                <a:solidFill>
+                  <a:schemeClr val="accent6"/>
+                </a:solidFill>
+              </a:rPr>
+              <a:t>-increase side length</a:t>
+            </a:r>
+            <a:endParaRPr lang="en-BE" sz="3200" dirty="0">
+              <a:solidFill>
+                <a:schemeClr val="accent6"/>
+              </a:solidFill>
+            </a:endParaRPr>
           </a:p>
         </p:txBody>
       </p:sp>
+      <p:sp>
+        <p:nvSpPr>
+          <p:cNvPr id="7" name="Rectangle 6">
+            <a:extLst>
+              <a:ext uri="{FF2B5EF4-FFF2-40B4-BE49-F238E27FC236}">
+                <a16:creationId xmlns:a16="http://schemas.microsoft.com/office/drawing/2014/main" id="{1AE22AF5-DB1A-8AF6-1D7C-FCA26E54D345}"/>
+              </a:ext>
+            </a:extLst>
+          </p:cNvPr>
+          <p:cNvSpPr/>
+          <p:nvPr/>
+        </p:nvSpPr>
+        <p:spPr>
+          <a:xfrm>
+            <a:off x="560832" y="1545336"/>
+            <a:ext cx="11207496" cy="4631627"/>
+          </a:xfrm>
+          <a:prstGeom prst="rect">
+            <a:avLst/>
+          </a:prstGeom>
+          <a:solidFill>
+            <a:schemeClr val="bg1"/>
+          </a:solidFill>
+          <a:ln>
+            <a:solidFill>
+              <a:schemeClr val="bg1"/>
+            </a:solidFill>
+          </a:ln>
+        </p:spPr>
+        <p:style>
+          <a:lnRef idx="2">
+            <a:schemeClr val="accent1">
+              <a:shade val="15000"/>
+            </a:schemeClr>
+          </a:lnRef>
+          <a:fillRef idx="1">
+            <a:schemeClr val="accent1"/>
+          </a:fillRef>
+          <a:effectRef idx="0">
+            <a:schemeClr val="accent1"/>
+          </a:effectRef>
+          <a:fontRef idx="minor">
+            <a:schemeClr val="lt1"/>
+          </a:fontRef>
+        </p:style>
+        <p:txBody>
+          <a:bodyPr rtlCol="0" anchor="ctr"/>
+          <a:lstStyle/>
+          <a:p>
+            <a:pPr algn="ctr"/>
+            <a:endParaRPr lang="en-BE"/>
+          </a:p>
+        </p:txBody>
+      </p:sp>
+      <p:sp>
+        <p:nvSpPr>
+          <p:cNvPr id="8" name="TextBox 7">
+            <a:extLst>
+              <a:ext uri="{FF2B5EF4-FFF2-40B4-BE49-F238E27FC236}">
+                <a16:creationId xmlns:a16="http://schemas.microsoft.com/office/drawing/2014/main" id="{CAAE8F26-D272-1C12-9DA9-EE198A7DCC14}"/>
+              </a:ext>
+            </a:extLst>
+          </p:cNvPr>
+          <p:cNvSpPr txBox="1"/>
+          <p:nvPr/>
+        </p:nvSpPr>
+        <p:spPr>
+          <a:xfrm>
+            <a:off x="1072394" y="1690538"/>
+            <a:ext cx="3719061" cy="954107"/>
+          </a:xfrm>
+          <a:prstGeom prst="rect">
+            <a:avLst/>
+          </a:prstGeom>
+          <a:noFill/>
+        </p:spPr>
+        <p:txBody>
+          <a:bodyPr wrap="square" rtlCol="0">
+            <a:spAutoFit/>
+          </a:bodyPr>
+          <a:lstStyle/>
+          <a:p>
+            <a:r>
+              <a:rPr lang="en-US" sz="2800" dirty="0"/>
+              <a:t>Exploring Houses</a:t>
+            </a:r>
+          </a:p>
+          <a:p>
+            <a:r>
+              <a:rPr lang="en-US" sz="2800" dirty="0"/>
+              <a:t>-Go to center</a:t>
+            </a:r>
+            <a:endParaRPr lang="en-BE" sz="2800" dirty="0"/>
+          </a:p>
+        </p:txBody>
+      </p:sp>
+      <p:sp>
+        <p:nvSpPr>
+          <p:cNvPr id="9" name="TextBox 8">
+            <a:extLst>
+              <a:ext uri="{FF2B5EF4-FFF2-40B4-BE49-F238E27FC236}">
+                <a16:creationId xmlns:a16="http://schemas.microsoft.com/office/drawing/2014/main" id="{CDEB65EF-AD97-F00B-5FCF-DC6E11C67FD2}"/>
+              </a:ext>
+            </a:extLst>
+          </p:cNvPr>
+          <p:cNvSpPr txBox="1"/>
+          <p:nvPr/>
+        </p:nvSpPr>
+        <p:spPr>
+          <a:xfrm>
+            <a:off x="1072394" y="3297418"/>
+            <a:ext cx="3090672" cy="523220"/>
+          </a:xfrm>
+          <a:prstGeom prst="rect">
+            <a:avLst/>
+          </a:prstGeom>
+          <a:noFill/>
+        </p:spPr>
+        <p:txBody>
+          <a:bodyPr wrap="square" rtlCol="0">
+            <a:spAutoFit/>
+          </a:bodyPr>
+          <a:lstStyle/>
+          <a:p>
+            <a:r>
+              <a:rPr lang="en-US" sz="2800" dirty="0"/>
+              <a:t>Constant rotation</a:t>
+            </a:r>
+            <a:endParaRPr lang="en-BE" sz="2800" dirty="0"/>
+          </a:p>
+        </p:txBody>
+      </p:sp>
+      <p:sp>
+        <p:nvSpPr>
+          <p:cNvPr id="11" name="Rectangle 10">
+            <a:extLst>
+              <a:ext uri="{FF2B5EF4-FFF2-40B4-BE49-F238E27FC236}">
+                <a16:creationId xmlns:a16="http://schemas.microsoft.com/office/drawing/2014/main" id="{7AD02EE7-235E-A310-7141-542E6B0D8E42}"/>
+              </a:ext>
+            </a:extLst>
+          </p:cNvPr>
+          <p:cNvSpPr/>
+          <p:nvPr/>
+        </p:nvSpPr>
+        <p:spPr>
+          <a:xfrm>
+            <a:off x="560832" y="1399032"/>
+            <a:ext cx="10792968" cy="4351338"/>
+          </a:xfrm>
+          <a:prstGeom prst="rect">
+            <a:avLst/>
+          </a:prstGeom>
+          <a:solidFill>
+            <a:schemeClr val="bg1"/>
+          </a:solidFill>
+          <a:ln>
+            <a:solidFill>
+              <a:schemeClr val="bg1"/>
+            </a:solidFill>
+          </a:ln>
+        </p:spPr>
+        <p:style>
+          <a:lnRef idx="2">
+            <a:schemeClr val="accent1">
+              <a:shade val="15000"/>
+            </a:schemeClr>
+          </a:lnRef>
+          <a:fillRef idx="1">
+            <a:schemeClr val="accent1"/>
+          </a:fillRef>
+          <a:effectRef idx="0">
+            <a:schemeClr val="accent1"/>
+          </a:effectRef>
+          <a:fontRef idx="minor">
+            <a:schemeClr val="lt1"/>
+          </a:fontRef>
+        </p:style>
+        <p:txBody>
+          <a:bodyPr rtlCol="0" anchor="ctr"/>
+          <a:lstStyle/>
+          <a:p>
+            <a:pPr algn="ctr"/>
+            <a:endParaRPr lang="en-BE"/>
+          </a:p>
+        </p:txBody>
+      </p:sp>
+      <p:sp>
+        <p:nvSpPr>
+          <p:cNvPr id="12" name="TextBox 11">
+            <a:extLst>
+              <a:ext uri="{FF2B5EF4-FFF2-40B4-BE49-F238E27FC236}">
+                <a16:creationId xmlns:a16="http://schemas.microsoft.com/office/drawing/2014/main" id="{33F7BDC5-C31C-A564-C6A5-FF7373B00468}"/>
+              </a:ext>
+            </a:extLst>
+          </p:cNvPr>
+          <p:cNvSpPr txBox="1"/>
+          <p:nvPr/>
+        </p:nvSpPr>
+        <p:spPr>
+          <a:xfrm>
+            <a:off x="1475232" y="1770702"/>
+            <a:ext cx="4855464" cy="2062103"/>
+          </a:xfrm>
+          <a:prstGeom prst="rect">
+            <a:avLst/>
+          </a:prstGeom>
+          <a:noFill/>
+        </p:spPr>
+        <p:txBody>
+          <a:bodyPr wrap="square" rtlCol="0">
+            <a:spAutoFit/>
+          </a:bodyPr>
+          <a:lstStyle/>
+          <a:p>
+            <a:r>
+              <a:rPr lang="en-US" sz="3200" dirty="0"/>
+              <a:t>Storing houses</a:t>
+            </a:r>
+          </a:p>
+          <a:p>
+            <a:r>
+              <a:rPr lang="en-US" sz="3200" dirty="0"/>
+              <a:t>-List of houses</a:t>
+            </a:r>
+          </a:p>
+          <a:p>
+            <a:r>
+              <a:rPr lang="en-US" sz="3200" dirty="0"/>
+              <a:t>-house index</a:t>
+            </a:r>
+          </a:p>
+          <a:p>
+            <a:r>
+              <a:rPr lang="en-US" sz="3200" dirty="0"/>
+              <a:t>-house threshold</a:t>
+            </a:r>
+          </a:p>
+        </p:txBody>
+      </p:sp>
+      <p:sp>
+        <p:nvSpPr>
+          <p:cNvPr id="13" name="TextBox 12">
+            <a:extLst>
+              <a:ext uri="{FF2B5EF4-FFF2-40B4-BE49-F238E27FC236}">
+                <a16:creationId xmlns:a16="http://schemas.microsoft.com/office/drawing/2014/main" id="{CAA9349F-2250-31E0-7F55-8E3CBEA6B758}"/>
+              </a:ext>
+            </a:extLst>
+          </p:cNvPr>
+          <p:cNvSpPr txBox="1"/>
+          <p:nvPr/>
+        </p:nvSpPr>
+        <p:spPr>
+          <a:xfrm>
+            <a:off x="1600200" y="4307302"/>
+            <a:ext cx="2432304" cy="707886"/>
+          </a:xfrm>
+          <a:prstGeom prst="rect">
+            <a:avLst/>
+          </a:prstGeom>
+          <a:noFill/>
+        </p:spPr>
+        <p:txBody>
+          <a:bodyPr wrap="square" rtlCol="0">
+            <a:spAutoFit/>
+          </a:bodyPr>
+          <a:lstStyle/>
+          <a:p>
+            <a:r>
+              <a:rPr lang="en-US" sz="2000" dirty="0">
+                <a:solidFill>
+                  <a:srgbClr val="C00000"/>
+                </a:solidFill>
+              </a:rPr>
+              <a:t>If new house spotted</a:t>
+            </a:r>
+          </a:p>
+          <a:p>
+            <a:r>
+              <a:rPr lang="en-US" sz="2000" dirty="0">
+                <a:solidFill>
+                  <a:srgbClr val="C00000"/>
+                </a:solidFill>
+              </a:rPr>
+              <a:t>-add to list</a:t>
+            </a:r>
+            <a:endParaRPr lang="en-BE" sz="2000" dirty="0">
+              <a:solidFill>
+                <a:srgbClr val="C00000"/>
+              </a:solidFill>
+            </a:endParaRPr>
+          </a:p>
+        </p:txBody>
+      </p:sp>
+      <p:sp>
+        <p:nvSpPr>
+          <p:cNvPr id="14" name="TextBox 13">
+            <a:extLst>
+              <a:ext uri="{FF2B5EF4-FFF2-40B4-BE49-F238E27FC236}">
+                <a16:creationId xmlns:a16="http://schemas.microsoft.com/office/drawing/2014/main" id="{1191B478-DDDE-DB71-D7B3-CBA511A67C28}"/>
+              </a:ext>
+            </a:extLst>
+          </p:cNvPr>
+          <p:cNvSpPr txBox="1"/>
+          <p:nvPr/>
+        </p:nvSpPr>
+        <p:spPr>
+          <a:xfrm>
+            <a:off x="5954586" y="2055058"/>
+            <a:ext cx="4963349" cy="3539430"/>
+          </a:xfrm>
+          <a:prstGeom prst="rect">
+            <a:avLst/>
+          </a:prstGeom>
+          <a:noFill/>
+        </p:spPr>
+        <p:txBody>
+          <a:bodyPr wrap="square" rtlCol="0">
+            <a:spAutoFit/>
+          </a:bodyPr>
+          <a:lstStyle/>
+          <a:p>
+            <a:r>
+              <a:rPr lang="en-US" sz="3200" dirty="0">
+                <a:solidFill>
+                  <a:srgbClr val="C00000"/>
+                </a:solidFill>
+              </a:rPr>
+              <a:t>End house exploration</a:t>
+            </a:r>
+          </a:p>
+          <a:p>
+            <a:pPr marL="342900" indent="-342900">
+              <a:buFont typeface="Wingdings" panose="05000000000000000000" pitchFamily="2" charset="2"/>
+              <a:buChar char="è"/>
+            </a:pPr>
+            <a:r>
+              <a:rPr lang="en-US" sz="3200" dirty="0">
+                <a:solidFill>
+                  <a:srgbClr val="C00000"/>
+                </a:solidFill>
+              </a:rPr>
+              <a:t>Ask for next</a:t>
+            </a:r>
+          </a:p>
+          <a:p>
+            <a:pPr marL="342900" indent="-342900">
+              <a:buFont typeface="Wingdings" panose="05000000000000000000" pitchFamily="2" charset="2"/>
+              <a:buChar char="è"/>
+            </a:pPr>
+            <a:r>
+              <a:rPr lang="en-US" sz="3200" dirty="0">
+                <a:solidFill>
+                  <a:srgbClr val="C00000"/>
+                </a:solidFill>
+              </a:rPr>
+              <a:t>Increment index</a:t>
+            </a:r>
+          </a:p>
+          <a:p>
+            <a:pPr marL="342900" indent="-342900">
+              <a:buFont typeface="Wingdings" panose="05000000000000000000" pitchFamily="2" charset="2"/>
+              <a:buChar char="è"/>
+            </a:pPr>
+            <a:r>
+              <a:rPr lang="en-US" sz="3200" dirty="0">
+                <a:solidFill>
+                  <a:srgbClr val="C00000"/>
+                </a:solidFill>
+              </a:rPr>
+              <a:t>Checks if index in range</a:t>
+            </a:r>
+          </a:p>
+          <a:p>
+            <a:pPr marL="342900" indent="-342900">
+              <a:buFont typeface="Wingdings" panose="05000000000000000000" pitchFamily="2" charset="2"/>
+              <a:buChar char="è"/>
+            </a:pPr>
+            <a:r>
+              <a:rPr lang="en-US" sz="3200" dirty="0">
+                <a:solidFill>
+                  <a:srgbClr val="C00000"/>
+                </a:solidFill>
+              </a:rPr>
+              <a:t>Return next house</a:t>
+            </a:r>
+          </a:p>
+          <a:p>
+            <a:pPr marL="342900" indent="-342900">
+              <a:buFont typeface="Wingdings" panose="05000000000000000000" pitchFamily="2" charset="2"/>
+              <a:buChar char="è"/>
+            </a:pPr>
+            <a:r>
+              <a:rPr lang="en-US" sz="3200" dirty="0">
+                <a:solidFill>
+                  <a:srgbClr val="C00000"/>
+                </a:solidFill>
+              </a:rPr>
+              <a:t>Return </a:t>
+            </a:r>
+            <a:r>
+              <a:rPr lang="en-US" sz="3200" dirty="0" err="1">
+                <a:solidFill>
+                  <a:srgbClr val="C00000"/>
+                </a:solidFill>
+              </a:rPr>
+              <a:t>nullptr</a:t>
+            </a:r>
+            <a:endParaRPr lang="en-US" sz="3200" dirty="0">
+              <a:solidFill>
+                <a:srgbClr val="C00000"/>
+              </a:solidFill>
+            </a:endParaRPr>
+          </a:p>
+          <a:p>
+            <a:pPr marL="342900" indent="-342900">
+              <a:buFont typeface="Wingdings" panose="05000000000000000000" pitchFamily="2" charset="2"/>
+              <a:buChar char="è"/>
+            </a:pPr>
+            <a:r>
+              <a:rPr lang="en-US" sz="3200" dirty="0">
+                <a:solidFill>
+                  <a:srgbClr val="C00000"/>
+                </a:solidFill>
+              </a:rPr>
+              <a:t>Return first</a:t>
+            </a:r>
+          </a:p>
+        </p:txBody>
+      </p:sp>
+      <p:pic>
+        <p:nvPicPr>
+          <p:cNvPr id="15" name="20260607-1935-53.6329662">
+            <a:hlinkClick r:id="" action="ppaction://media"/>
+            <a:extLst>
+              <a:ext uri="{FF2B5EF4-FFF2-40B4-BE49-F238E27FC236}">
+                <a16:creationId xmlns:a16="http://schemas.microsoft.com/office/drawing/2014/main" id="{AA10B6D3-0634-EDDF-A8A5-1C601C2B6580}"/>
+              </a:ext>
+            </a:extLst>
+          </p:cNvPr>
+          <p:cNvPicPr>
+            <a:picLocks noChangeAspect="1"/>
+          </p:cNvPicPr>
+          <p:nvPr>
+            <a:videoFile r:link="rId2"/>
+            <p:extLst>
+              <p:ext uri="{DAA4B4D4-6D71-4841-9C94-3DE7FCFB9230}">
+                <p14:media xmlns:p14="http://schemas.microsoft.com/office/powerpoint/2010/main" r:embed="rId1"/>
+              </p:ext>
+            </p:extLst>
+          </p:nvPr>
+        </p:nvPicPr>
+        <p:blipFill>
+          <a:blip r:embed="rId5"/>
+          <a:stretch>
+            <a:fillRect/>
+          </a:stretch>
+        </p:blipFill>
+        <p:spPr>
+          <a:xfrm>
+            <a:off x="1471711" y="350487"/>
+            <a:ext cx="7355205" cy="5826476"/>
+          </a:xfrm>
+          <a:prstGeom prst="rect">
+            <a:avLst/>
+          </a:prstGeom>
+        </p:spPr>
+      </p:pic>
     </p:spTree>
     <p:extLst>
       <p:ext uri="{BB962C8B-B14F-4D97-AF65-F5344CB8AC3E}">
-        <p14:creationId xmlns:p14="http://schemas.microsoft.com/office/powerpoint/2010/main" val="3827530984"/>
+        <p14:creationId xmlns:p14="http://schemas.microsoft.com/office/powerpoint/2010/main" val="1652142467"/>
       </p:ext>
     </p:extLst>
   </p:cSld>
   <p:clrMapOvr>
     <a:masterClrMapping/>
   </p:clrMapOvr>
+  <p:timing>
+    <p:tnLst>
+      <p:par>
+        <p:cTn id="1" dur="indefinite" restart="never" nodeType="tmRoot">
+          <p:childTnLst>
+            <p:seq concurrent="1" nextAc="seek">
+              <p:cTn id="2" dur="indefinite" nodeType="mainSeq">
+                <p:childTnLst>
+                  <p:par>
+                    <p:cTn id="3" fill="hold">
+                      <p:stCondLst>
+                        <p:cond delay="indefinite"/>
+                      </p:stCondLst>
+                      <p:childTnLst>
+                        <p:par>
+                          <p:cTn id="4" fill="hold">
+                            <p:stCondLst>
+                              <p:cond delay="0"/>
+                            </p:stCondLst>
+                            <p:childTnLst>
+                              <p:par>
+                                <p:cTn id="5" presetID="1" presetClass="entr" presetSubtype="0" fill="hold" nodeType="clickEffect">
+                                  <p:stCondLst>
+                                    <p:cond delay="0"/>
+                                  </p:stCondLst>
+                                  <p:childTnLst>
+                                    <p:set>
+                                      <p:cBhvr>
+                                        <p:cTn id="6" dur="1" fill="hold">
+                                          <p:stCondLst>
+                                            <p:cond delay="0"/>
+                                          </p:stCondLst>
+                                        </p:cTn>
+                                        <p:tgtEl>
+                                          <p:spTgt spid="6">
+                                            <p:txEl>
+                                              <p:pRg st="0" end="0"/>
+                                            </p:txEl>
+                                          </p:spTgt>
+                                        </p:tgtEl>
+                                        <p:attrNameLst>
+                                          <p:attrName>style.visibility</p:attrName>
+                                        </p:attrNameLst>
+                                      </p:cBhvr>
+                                      <p:to>
+                                        <p:strVal val="visible"/>
+                                      </p:to>
+                                    </p:set>
+                                  </p:childTnLst>
+                                </p:cTn>
+                              </p:par>
+                              <p:par>
+                                <p:cTn id="7" presetID="1" presetClass="entr" presetSubtype="0" fill="hold" nodeType="withEffect">
+                                  <p:stCondLst>
+                                    <p:cond delay="0"/>
+                                  </p:stCondLst>
+                                  <p:childTnLst>
+                                    <p:set>
+                                      <p:cBhvr>
+                                        <p:cTn id="8" dur="1" fill="hold">
+                                          <p:stCondLst>
+                                            <p:cond delay="0"/>
+                                          </p:stCondLst>
+                                        </p:cTn>
+                                        <p:tgtEl>
+                                          <p:spTgt spid="6">
+                                            <p:txEl>
+                                              <p:pRg st="1" end="1"/>
+                                            </p:txEl>
+                                          </p:spTgt>
+                                        </p:tgtEl>
+                                        <p:attrNameLst>
+                                          <p:attrName>style.visibility</p:attrName>
+                                        </p:attrNameLst>
+                                      </p:cBhvr>
+                                      <p:to>
+                                        <p:strVal val="visible"/>
+                                      </p:to>
+                                    </p:set>
+                                  </p:childTnLst>
+                                </p:cTn>
+                              </p:par>
+                              <p:par>
+                                <p:cTn id="9" presetID="1" presetClass="entr" presetSubtype="0" fill="hold" nodeType="withEffect">
+                                  <p:stCondLst>
+                                    <p:cond delay="0"/>
+                                  </p:stCondLst>
+                                  <p:childTnLst>
+                                    <p:set>
+                                      <p:cBhvr>
+                                        <p:cTn id="10" dur="1" fill="hold">
+                                          <p:stCondLst>
+                                            <p:cond delay="0"/>
+                                          </p:stCondLst>
+                                        </p:cTn>
+                                        <p:tgtEl>
+                                          <p:spTgt spid="6">
+                                            <p:txEl>
+                                              <p:pRg st="2" end="2"/>
+                                            </p:txEl>
+                                          </p:spTgt>
+                                        </p:tgtEl>
+                                        <p:attrNameLst>
+                                          <p:attrName>style.visibility</p:attrName>
+                                        </p:attrNameLst>
+                                      </p:cBhvr>
+                                      <p:to>
+                                        <p:strVal val="visible"/>
+                                      </p:to>
+                                    </p:set>
+                                  </p:childTnLst>
+                                </p:cTn>
+                              </p:par>
+                              <p:par>
+                                <p:cTn id="11" presetID="1" presetClass="entr" presetSubtype="0" fill="hold" grpId="0" nodeType="withEffect">
+                                  <p:stCondLst>
+                                    <p:cond delay="0"/>
+                                  </p:stCondLst>
+                                  <p:childTnLst>
+                                    <p:set>
+                                      <p:cBhvr>
+                                        <p:cTn id="12" dur="1" fill="hold">
+                                          <p:stCondLst>
+                                            <p:cond delay="0"/>
+                                          </p:stCondLst>
+                                        </p:cTn>
+                                        <p:tgtEl>
+                                          <p:spTgt spid="5"/>
+                                        </p:tgtEl>
+                                        <p:attrNameLst>
+                                          <p:attrName>style.visibility</p:attrName>
+                                        </p:attrNameLst>
+                                      </p:cBhvr>
+                                      <p:to>
+                                        <p:strVal val="visible"/>
+                                      </p:to>
+                                    </p:set>
+                                  </p:childTnLst>
+                                </p:cTn>
+                              </p:par>
+                            </p:childTnLst>
+                          </p:cTn>
+                        </p:par>
+                      </p:childTnLst>
+                    </p:cTn>
+                  </p:par>
+                  <p:par>
+                    <p:cTn id="13" fill="hold">
+                      <p:stCondLst>
+                        <p:cond delay="indefinite"/>
+                      </p:stCondLst>
+                      <p:childTnLst>
+                        <p:par>
+                          <p:cTn id="14" fill="hold">
+                            <p:stCondLst>
+                              <p:cond delay="0"/>
+                            </p:stCondLst>
+                            <p:childTnLst>
+                              <p:par>
+                                <p:cTn id="15" presetID="1" presetClass="entr" presetSubtype="0" fill="hold" nodeType="clickEffect">
+                                  <p:stCondLst>
+                                    <p:cond delay="0"/>
+                                  </p:stCondLst>
+                                  <p:childTnLst>
+                                    <p:set>
+                                      <p:cBhvr>
+                                        <p:cTn id="16" dur="1" fill="hold">
+                                          <p:stCondLst>
+                                            <p:cond delay="0"/>
+                                          </p:stCondLst>
+                                        </p:cTn>
+                                        <p:tgtEl>
+                                          <p:spTgt spid="6">
+                                            <p:txEl>
+                                              <p:pRg st="4" end="4"/>
+                                            </p:txEl>
+                                          </p:spTgt>
+                                        </p:tgtEl>
+                                        <p:attrNameLst>
+                                          <p:attrName>style.visibility</p:attrName>
+                                        </p:attrNameLst>
+                                      </p:cBhvr>
+                                      <p:to>
+                                        <p:strVal val="visible"/>
+                                      </p:to>
+                                    </p:set>
+                                  </p:childTnLst>
+                                </p:cTn>
+                              </p:par>
+                              <p:par>
+                                <p:cTn id="17" presetID="1" presetClass="entr" presetSubtype="0" fill="hold" nodeType="withEffect">
+                                  <p:stCondLst>
+                                    <p:cond delay="0"/>
+                                  </p:stCondLst>
+                                  <p:childTnLst>
+                                    <p:set>
+                                      <p:cBhvr>
+                                        <p:cTn id="18" dur="1" fill="hold">
+                                          <p:stCondLst>
+                                            <p:cond delay="0"/>
+                                          </p:stCondLst>
+                                        </p:cTn>
+                                        <p:tgtEl>
+                                          <p:spTgt spid="6">
+                                            <p:txEl>
+                                              <p:pRg st="5" end="5"/>
+                                            </p:txEl>
+                                          </p:spTgt>
+                                        </p:tgtEl>
+                                        <p:attrNameLst>
+                                          <p:attrName>style.visibility</p:attrName>
+                                        </p:attrNameLst>
+                                      </p:cBhvr>
+                                      <p:to>
+                                        <p:strVal val="visible"/>
+                                      </p:to>
+                                    </p:set>
+                                  </p:childTnLst>
+                                </p:cTn>
+                              </p:par>
+                              <p:par>
+                                <p:cTn id="19" presetID="1" presetClass="entr" presetSubtype="0" fill="hold" nodeType="withEffect">
+                                  <p:stCondLst>
+                                    <p:cond delay="0"/>
+                                  </p:stCondLst>
+                                  <p:childTnLst>
+                                    <p:set>
+                                      <p:cBhvr>
+                                        <p:cTn id="20" dur="1" fill="hold">
+                                          <p:stCondLst>
+                                            <p:cond delay="0"/>
+                                          </p:stCondLst>
+                                        </p:cTn>
+                                        <p:tgtEl>
+                                          <p:spTgt spid="6">
+                                            <p:txEl>
+                                              <p:pRg st="6" end="6"/>
+                                            </p:txEl>
+                                          </p:spTgt>
+                                        </p:tgtEl>
+                                        <p:attrNameLst>
+                                          <p:attrName>style.visibility</p:attrName>
+                                        </p:attrNameLst>
+                                      </p:cBhvr>
+                                      <p:to>
+                                        <p:strVal val="visible"/>
+                                      </p:to>
+                                    </p:set>
+                                  </p:childTnLst>
+                                </p:cTn>
+                              </p:par>
+                              <p:par>
+                                <p:cTn id="21" presetID="1" presetClass="entr" presetSubtype="0" fill="hold" nodeType="withEffect">
+                                  <p:stCondLst>
+                                    <p:cond delay="0"/>
+                                  </p:stCondLst>
+                                  <p:childTnLst>
+                                    <p:set>
+                                      <p:cBhvr>
+                                        <p:cTn id="22" dur="1" fill="hold">
+                                          <p:stCondLst>
+                                            <p:cond delay="0"/>
+                                          </p:stCondLst>
+                                        </p:cTn>
+                                        <p:tgtEl>
+                                          <p:spTgt spid="6">
+                                            <p:txEl>
+                                              <p:pRg st="7" end="7"/>
+                                            </p:txEl>
+                                          </p:spTgt>
+                                        </p:tgtEl>
+                                        <p:attrNameLst>
+                                          <p:attrName>style.visibility</p:attrName>
+                                        </p:attrNameLst>
+                                      </p:cBhvr>
+                                      <p:to>
+                                        <p:strVal val="visible"/>
+                                      </p:to>
+                                    </p:set>
+                                  </p:childTnLst>
+                                </p:cTn>
+                              </p:par>
+                            </p:childTnLst>
+                          </p:cTn>
+                        </p:par>
+                      </p:childTnLst>
+                    </p:cTn>
+                  </p:par>
+                  <p:par>
+                    <p:cTn id="23" fill="hold">
+                      <p:stCondLst>
+                        <p:cond delay="indefinite"/>
+                      </p:stCondLst>
+                      <p:childTnLst>
+                        <p:par>
+                          <p:cTn id="24" fill="hold">
+                            <p:stCondLst>
+                              <p:cond delay="0"/>
+                            </p:stCondLst>
+                            <p:childTnLst>
+                              <p:par>
+                                <p:cTn id="25" presetID="1" presetClass="entr" presetSubtype="0" fill="hold" nodeType="clickEffect">
+                                  <p:stCondLst>
+                                    <p:cond delay="0"/>
+                                  </p:stCondLst>
+                                  <p:childTnLst>
+                                    <p:set>
+                                      <p:cBhvr>
+                                        <p:cTn id="26" dur="1" fill="hold">
+                                          <p:stCondLst>
+                                            <p:cond delay="0"/>
+                                          </p:stCondLst>
+                                        </p:cTn>
+                                        <p:tgtEl>
+                                          <p:spTgt spid="4"/>
+                                        </p:tgtEl>
+                                        <p:attrNameLst>
+                                          <p:attrName>style.visibility</p:attrName>
+                                        </p:attrNameLst>
+                                      </p:cBhvr>
+                                      <p:to>
+                                        <p:strVal val="visible"/>
+                                      </p:to>
+                                    </p:set>
+                                  </p:childTnLst>
+                                </p:cTn>
+                              </p:par>
+                            </p:childTnLst>
+                          </p:cTn>
+                        </p:par>
+                      </p:childTnLst>
+                    </p:cTn>
+                  </p:par>
+                  <p:par>
+                    <p:cTn id="27" fill="hold">
+                      <p:stCondLst>
+                        <p:cond delay="indefinite"/>
+                      </p:stCondLst>
+                      <p:childTnLst>
+                        <p:par>
+                          <p:cTn id="28" fill="hold">
+                            <p:stCondLst>
+                              <p:cond delay="0"/>
+                            </p:stCondLst>
+                            <p:childTnLst>
+                              <p:par>
+                                <p:cTn id="29" presetID="1" presetClass="entr" presetSubtype="0" fill="hold" grpId="0" nodeType="clickEffect">
+                                  <p:stCondLst>
+                                    <p:cond delay="0"/>
+                                  </p:stCondLst>
+                                  <p:childTnLst>
+                                    <p:set>
+                                      <p:cBhvr>
+                                        <p:cTn id="30" dur="1" fill="hold">
+                                          <p:stCondLst>
+                                            <p:cond delay="0"/>
+                                          </p:stCondLst>
+                                        </p:cTn>
+                                        <p:tgtEl>
+                                          <p:spTgt spid="7"/>
+                                        </p:tgtEl>
+                                        <p:attrNameLst>
+                                          <p:attrName>style.visibility</p:attrName>
+                                        </p:attrNameLst>
+                                      </p:cBhvr>
+                                      <p:to>
+                                        <p:strVal val="visible"/>
+                                      </p:to>
+                                    </p:set>
+                                  </p:childTnLst>
+                                </p:cTn>
+                              </p:par>
+                              <p:par>
+                                <p:cTn id="31" presetID="1" presetClass="entr" presetSubtype="0" fill="hold" grpId="0" nodeType="withEffect">
+                                  <p:stCondLst>
+                                    <p:cond delay="0"/>
+                                  </p:stCondLst>
+                                  <p:childTnLst>
+                                    <p:set>
+                                      <p:cBhvr>
+                                        <p:cTn id="32" dur="1" fill="hold">
+                                          <p:stCondLst>
+                                            <p:cond delay="0"/>
+                                          </p:stCondLst>
+                                        </p:cTn>
+                                        <p:tgtEl>
+                                          <p:spTgt spid="8"/>
+                                        </p:tgtEl>
+                                        <p:attrNameLst>
+                                          <p:attrName>style.visibility</p:attrName>
+                                        </p:attrNameLst>
+                                      </p:cBhvr>
+                                      <p:to>
+                                        <p:strVal val="visible"/>
+                                      </p:to>
+                                    </p:set>
+                                  </p:childTnLst>
+                                </p:cTn>
+                              </p:par>
+                            </p:childTnLst>
+                          </p:cTn>
+                        </p:par>
+                      </p:childTnLst>
+                    </p:cTn>
+                  </p:par>
+                  <p:par>
+                    <p:cTn id="33" fill="hold">
+                      <p:stCondLst>
+                        <p:cond delay="indefinite"/>
+                      </p:stCondLst>
+                      <p:childTnLst>
+                        <p:par>
+                          <p:cTn id="34" fill="hold">
+                            <p:stCondLst>
+                              <p:cond delay="0"/>
+                            </p:stCondLst>
+                            <p:childTnLst>
+                              <p:par>
+                                <p:cTn id="35" presetID="1" presetClass="entr" presetSubtype="0" fill="hold" grpId="0" nodeType="clickEffect">
+                                  <p:stCondLst>
+                                    <p:cond delay="0"/>
+                                  </p:stCondLst>
+                                  <p:childTnLst>
+                                    <p:set>
+                                      <p:cBhvr>
+                                        <p:cTn id="36" dur="1" fill="hold">
+                                          <p:stCondLst>
+                                            <p:cond delay="0"/>
+                                          </p:stCondLst>
+                                        </p:cTn>
+                                        <p:tgtEl>
+                                          <p:spTgt spid="9"/>
+                                        </p:tgtEl>
+                                        <p:attrNameLst>
+                                          <p:attrName>style.visibility</p:attrName>
+                                        </p:attrNameLst>
+                                      </p:cBhvr>
+                                      <p:to>
+                                        <p:strVal val="visible"/>
+                                      </p:to>
+                                    </p:set>
+                                  </p:childTnLst>
+                                </p:cTn>
+                              </p:par>
+                            </p:childTnLst>
+                          </p:cTn>
+                        </p:par>
+                      </p:childTnLst>
+                    </p:cTn>
+                  </p:par>
+                  <p:par>
+                    <p:cTn id="37" fill="hold">
+                      <p:stCondLst>
+                        <p:cond delay="indefinite"/>
+                      </p:stCondLst>
+                      <p:childTnLst>
+                        <p:par>
+                          <p:cTn id="38" fill="hold">
+                            <p:stCondLst>
+                              <p:cond delay="0"/>
+                            </p:stCondLst>
+                            <p:childTnLst>
+                              <p:par>
+                                <p:cTn id="39" presetID="1" presetClass="entr" presetSubtype="0" fill="hold" grpId="0" nodeType="clickEffect">
+                                  <p:stCondLst>
+                                    <p:cond delay="0"/>
+                                  </p:stCondLst>
+                                  <p:childTnLst>
+                                    <p:set>
+                                      <p:cBhvr>
+                                        <p:cTn id="40" dur="1" fill="hold">
+                                          <p:stCondLst>
+                                            <p:cond delay="0"/>
+                                          </p:stCondLst>
+                                        </p:cTn>
+                                        <p:tgtEl>
+                                          <p:spTgt spid="11"/>
+                                        </p:tgtEl>
+                                        <p:attrNameLst>
+                                          <p:attrName>style.visibility</p:attrName>
+                                        </p:attrNameLst>
+                                      </p:cBhvr>
+                                      <p:to>
+                                        <p:strVal val="visible"/>
+                                      </p:to>
+                                    </p:set>
+                                  </p:childTnLst>
+                                </p:cTn>
+                              </p:par>
+                              <p:par>
+                                <p:cTn id="41" presetID="1" presetClass="entr" presetSubtype="0" fill="hold" grpId="0" nodeType="withEffect">
+                                  <p:stCondLst>
+                                    <p:cond delay="0"/>
+                                  </p:stCondLst>
+                                  <p:childTnLst>
+                                    <p:set>
+                                      <p:cBhvr>
+                                        <p:cTn id="42" dur="1" fill="hold">
+                                          <p:stCondLst>
+                                            <p:cond delay="0"/>
+                                          </p:stCondLst>
+                                        </p:cTn>
+                                        <p:tgtEl>
+                                          <p:spTgt spid="12"/>
+                                        </p:tgtEl>
+                                        <p:attrNameLst>
+                                          <p:attrName>style.visibility</p:attrName>
+                                        </p:attrNameLst>
+                                      </p:cBhvr>
+                                      <p:to>
+                                        <p:strVal val="visible"/>
+                                      </p:to>
+                                    </p:set>
+                                  </p:childTnLst>
+                                </p:cTn>
+                              </p:par>
+                            </p:childTnLst>
+                          </p:cTn>
+                        </p:par>
+                      </p:childTnLst>
+                    </p:cTn>
+                  </p:par>
+                  <p:par>
+                    <p:cTn id="43" fill="hold">
+                      <p:stCondLst>
+                        <p:cond delay="indefinite"/>
+                      </p:stCondLst>
+                      <p:childTnLst>
+                        <p:par>
+                          <p:cTn id="44" fill="hold">
+                            <p:stCondLst>
+                              <p:cond delay="0"/>
+                            </p:stCondLst>
+                            <p:childTnLst>
+                              <p:par>
+                                <p:cTn id="45" presetID="1" presetClass="entr" presetSubtype="0" fill="hold" grpId="0" nodeType="clickEffect">
+                                  <p:stCondLst>
+                                    <p:cond delay="0"/>
+                                  </p:stCondLst>
+                                  <p:childTnLst>
+                                    <p:set>
+                                      <p:cBhvr>
+                                        <p:cTn id="46" dur="1" fill="hold">
+                                          <p:stCondLst>
+                                            <p:cond delay="0"/>
+                                          </p:stCondLst>
+                                        </p:cTn>
+                                        <p:tgtEl>
+                                          <p:spTgt spid="13"/>
+                                        </p:tgtEl>
+                                        <p:attrNameLst>
+                                          <p:attrName>style.visibility</p:attrName>
+                                        </p:attrNameLst>
+                                      </p:cBhvr>
+                                      <p:to>
+                                        <p:strVal val="visible"/>
+                                      </p:to>
+                                    </p:set>
+                                  </p:childTnLst>
+                                </p:cTn>
+                              </p:par>
+                            </p:childTnLst>
+                          </p:cTn>
+                        </p:par>
+                      </p:childTnLst>
+                    </p:cTn>
+                  </p:par>
+                  <p:par>
+                    <p:cTn id="47" fill="hold">
+                      <p:stCondLst>
+                        <p:cond delay="indefinite"/>
+                      </p:stCondLst>
+                      <p:childTnLst>
+                        <p:par>
+                          <p:cTn id="48" fill="hold">
+                            <p:stCondLst>
+                              <p:cond delay="0"/>
+                            </p:stCondLst>
+                            <p:childTnLst>
+                              <p:par>
+                                <p:cTn id="49" presetID="1" presetClass="entr" presetSubtype="0" fill="hold" nodeType="clickEffect">
+                                  <p:stCondLst>
+                                    <p:cond delay="0"/>
+                                  </p:stCondLst>
+                                  <p:childTnLst>
+                                    <p:set>
+                                      <p:cBhvr>
+                                        <p:cTn id="50" dur="1" fill="hold">
+                                          <p:stCondLst>
+                                            <p:cond delay="0"/>
+                                          </p:stCondLst>
+                                        </p:cTn>
+                                        <p:tgtEl>
+                                          <p:spTgt spid="14">
+                                            <p:txEl>
+                                              <p:pRg st="0" end="0"/>
+                                            </p:txEl>
+                                          </p:spTgt>
+                                        </p:tgtEl>
+                                        <p:attrNameLst>
+                                          <p:attrName>style.visibility</p:attrName>
+                                        </p:attrNameLst>
+                                      </p:cBhvr>
+                                      <p:to>
+                                        <p:strVal val="visible"/>
+                                      </p:to>
+                                    </p:set>
+                                  </p:childTnLst>
+                                </p:cTn>
+                              </p:par>
+                            </p:childTnLst>
+                          </p:cTn>
+                        </p:par>
+                      </p:childTnLst>
+                    </p:cTn>
+                  </p:par>
+                  <p:par>
+                    <p:cTn id="51" fill="hold">
+                      <p:stCondLst>
+                        <p:cond delay="indefinite"/>
+                      </p:stCondLst>
+                      <p:childTnLst>
+                        <p:par>
+                          <p:cTn id="52" fill="hold">
+                            <p:stCondLst>
+                              <p:cond delay="0"/>
+                            </p:stCondLst>
+                            <p:childTnLst>
+                              <p:par>
+                                <p:cTn id="53" presetID="1" presetClass="entr" presetSubtype="0" fill="hold" nodeType="clickEffect">
+                                  <p:stCondLst>
+                                    <p:cond delay="0"/>
+                                  </p:stCondLst>
+                                  <p:childTnLst>
+                                    <p:set>
+                                      <p:cBhvr>
+                                        <p:cTn id="54" dur="1" fill="hold">
+                                          <p:stCondLst>
+                                            <p:cond delay="0"/>
+                                          </p:stCondLst>
+                                        </p:cTn>
+                                        <p:tgtEl>
+                                          <p:spTgt spid="14">
+                                            <p:txEl>
+                                              <p:pRg st="1" end="1"/>
+                                            </p:txEl>
+                                          </p:spTgt>
+                                        </p:tgtEl>
+                                        <p:attrNameLst>
+                                          <p:attrName>style.visibility</p:attrName>
+                                        </p:attrNameLst>
+                                      </p:cBhvr>
+                                      <p:to>
+                                        <p:strVal val="visible"/>
+                                      </p:to>
+                                    </p:set>
+                                  </p:childTnLst>
+                                </p:cTn>
+                              </p:par>
+                            </p:childTnLst>
+                          </p:cTn>
+                        </p:par>
+                      </p:childTnLst>
+                    </p:cTn>
+                  </p:par>
+                  <p:par>
+                    <p:cTn id="55" fill="hold">
+                      <p:stCondLst>
+                        <p:cond delay="indefinite"/>
+                      </p:stCondLst>
+                      <p:childTnLst>
+                        <p:par>
+                          <p:cTn id="56" fill="hold">
+                            <p:stCondLst>
+                              <p:cond delay="0"/>
+                            </p:stCondLst>
+                            <p:childTnLst>
+                              <p:par>
+                                <p:cTn id="57" presetID="1" presetClass="entr" presetSubtype="0" fill="hold" nodeType="clickEffect">
+                                  <p:stCondLst>
+                                    <p:cond delay="0"/>
+                                  </p:stCondLst>
+                                  <p:childTnLst>
+                                    <p:set>
+                                      <p:cBhvr>
+                                        <p:cTn id="58" dur="1" fill="hold">
+                                          <p:stCondLst>
+                                            <p:cond delay="0"/>
+                                          </p:stCondLst>
+                                        </p:cTn>
+                                        <p:tgtEl>
+                                          <p:spTgt spid="14">
+                                            <p:txEl>
+                                              <p:pRg st="2" end="2"/>
+                                            </p:txEl>
+                                          </p:spTgt>
+                                        </p:tgtEl>
+                                        <p:attrNameLst>
+                                          <p:attrName>style.visibility</p:attrName>
+                                        </p:attrNameLst>
+                                      </p:cBhvr>
+                                      <p:to>
+                                        <p:strVal val="visible"/>
+                                      </p:to>
+                                    </p:set>
+                                  </p:childTnLst>
+                                </p:cTn>
+                              </p:par>
+                            </p:childTnLst>
+                          </p:cTn>
+                        </p:par>
+                      </p:childTnLst>
+                    </p:cTn>
+                  </p:par>
+                  <p:par>
+                    <p:cTn id="59" fill="hold">
+                      <p:stCondLst>
+                        <p:cond delay="indefinite"/>
+                      </p:stCondLst>
+                      <p:childTnLst>
+                        <p:par>
+                          <p:cTn id="60" fill="hold">
+                            <p:stCondLst>
+                              <p:cond delay="0"/>
+                            </p:stCondLst>
+                            <p:childTnLst>
+                              <p:par>
+                                <p:cTn id="61" presetID="1" presetClass="entr" presetSubtype="0" fill="hold" nodeType="clickEffect">
+                                  <p:stCondLst>
+                                    <p:cond delay="0"/>
+                                  </p:stCondLst>
+                                  <p:childTnLst>
+                                    <p:set>
+                                      <p:cBhvr>
+                                        <p:cTn id="62" dur="1" fill="hold">
+                                          <p:stCondLst>
+                                            <p:cond delay="0"/>
+                                          </p:stCondLst>
+                                        </p:cTn>
+                                        <p:tgtEl>
+                                          <p:spTgt spid="14">
+                                            <p:txEl>
+                                              <p:pRg st="3" end="3"/>
+                                            </p:txEl>
+                                          </p:spTgt>
+                                        </p:tgtEl>
+                                        <p:attrNameLst>
+                                          <p:attrName>style.visibility</p:attrName>
+                                        </p:attrNameLst>
+                                      </p:cBhvr>
+                                      <p:to>
+                                        <p:strVal val="visible"/>
+                                      </p:to>
+                                    </p:set>
+                                  </p:childTnLst>
+                                </p:cTn>
+                              </p:par>
+                            </p:childTnLst>
+                          </p:cTn>
+                        </p:par>
+                      </p:childTnLst>
+                    </p:cTn>
+                  </p:par>
+                  <p:par>
+                    <p:cTn id="63" fill="hold">
+                      <p:stCondLst>
+                        <p:cond delay="indefinite"/>
+                      </p:stCondLst>
+                      <p:childTnLst>
+                        <p:par>
+                          <p:cTn id="64" fill="hold">
+                            <p:stCondLst>
+                              <p:cond delay="0"/>
+                            </p:stCondLst>
+                            <p:childTnLst>
+                              <p:par>
+                                <p:cTn id="65" presetID="1" presetClass="entr" presetSubtype="0" fill="hold" nodeType="clickEffect">
+                                  <p:stCondLst>
+                                    <p:cond delay="0"/>
+                                  </p:stCondLst>
+                                  <p:childTnLst>
+                                    <p:set>
+                                      <p:cBhvr>
+                                        <p:cTn id="66" dur="1" fill="hold">
+                                          <p:stCondLst>
+                                            <p:cond delay="0"/>
+                                          </p:stCondLst>
+                                        </p:cTn>
+                                        <p:tgtEl>
+                                          <p:spTgt spid="14">
+                                            <p:txEl>
+                                              <p:pRg st="4" end="4"/>
+                                            </p:txEl>
+                                          </p:spTgt>
+                                        </p:tgtEl>
+                                        <p:attrNameLst>
+                                          <p:attrName>style.visibility</p:attrName>
+                                        </p:attrNameLst>
+                                      </p:cBhvr>
+                                      <p:to>
+                                        <p:strVal val="visible"/>
+                                      </p:to>
+                                    </p:set>
+                                  </p:childTnLst>
+                                </p:cTn>
+                              </p:par>
+                            </p:childTnLst>
+                          </p:cTn>
+                        </p:par>
+                      </p:childTnLst>
+                    </p:cTn>
+                  </p:par>
+                  <p:par>
+                    <p:cTn id="67" fill="hold">
+                      <p:stCondLst>
+                        <p:cond delay="indefinite"/>
+                      </p:stCondLst>
+                      <p:childTnLst>
+                        <p:par>
+                          <p:cTn id="68" fill="hold">
+                            <p:stCondLst>
+                              <p:cond delay="0"/>
+                            </p:stCondLst>
+                            <p:childTnLst>
+                              <p:par>
+                                <p:cTn id="69" presetID="1" presetClass="entr" presetSubtype="0" fill="hold" nodeType="clickEffect">
+                                  <p:stCondLst>
+                                    <p:cond delay="0"/>
+                                  </p:stCondLst>
+                                  <p:childTnLst>
+                                    <p:set>
+                                      <p:cBhvr>
+                                        <p:cTn id="70" dur="1" fill="hold">
+                                          <p:stCondLst>
+                                            <p:cond delay="0"/>
+                                          </p:stCondLst>
+                                        </p:cTn>
+                                        <p:tgtEl>
+                                          <p:spTgt spid="14">
+                                            <p:txEl>
+                                              <p:pRg st="5" end="5"/>
+                                            </p:txEl>
+                                          </p:spTgt>
+                                        </p:tgtEl>
+                                        <p:attrNameLst>
+                                          <p:attrName>style.visibility</p:attrName>
+                                        </p:attrNameLst>
+                                      </p:cBhvr>
+                                      <p:to>
+                                        <p:strVal val="visible"/>
+                                      </p:to>
+                                    </p:set>
+                                  </p:childTnLst>
+                                </p:cTn>
+                              </p:par>
+                            </p:childTnLst>
+                          </p:cTn>
+                        </p:par>
+                      </p:childTnLst>
+                    </p:cTn>
+                  </p:par>
+                  <p:par>
+                    <p:cTn id="71" fill="hold">
+                      <p:stCondLst>
+                        <p:cond delay="indefinite"/>
+                      </p:stCondLst>
+                      <p:childTnLst>
+                        <p:par>
+                          <p:cTn id="72" fill="hold">
+                            <p:stCondLst>
+                              <p:cond delay="0"/>
+                            </p:stCondLst>
+                            <p:childTnLst>
+                              <p:par>
+                                <p:cTn id="73" presetID="1" presetClass="entr" presetSubtype="0" fill="hold" nodeType="clickEffect">
+                                  <p:stCondLst>
+                                    <p:cond delay="0"/>
+                                  </p:stCondLst>
+                                  <p:childTnLst>
+                                    <p:set>
+                                      <p:cBhvr>
+                                        <p:cTn id="74" dur="1" fill="hold">
+                                          <p:stCondLst>
+                                            <p:cond delay="0"/>
+                                          </p:stCondLst>
+                                        </p:cTn>
+                                        <p:tgtEl>
+                                          <p:spTgt spid="14">
+                                            <p:txEl>
+                                              <p:pRg st="6" end="6"/>
+                                            </p:txEl>
+                                          </p:spTgt>
+                                        </p:tgtEl>
+                                        <p:attrNameLst>
+                                          <p:attrName>style.visibility</p:attrName>
+                                        </p:attrNameLst>
+                                      </p:cBhvr>
+                                      <p:to>
+                                        <p:strVal val="visible"/>
+                                      </p:to>
+                                    </p:set>
+                                  </p:childTnLst>
+                                </p:cTn>
+                              </p:par>
+                            </p:childTnLst>
+                          </p:cTn>
+                        </p:par>
+                      </p:childTnLst>
+                    </p:cTn>
+                  </p:par>
+                  <p:par>
+                    <p:cTn id="75" fill="hold">
+                      <p:stCondLst>
+                        <p:cond delay="indefinite"/>
+                      </p:stCondLst>
+                      <p:childTnLst>
+                        <p:par>
+                          <p:cTn id="76" fill="hold">
+                            <p:stCondLst>
+                              <p:cond delay="0"/>
+                            </p:stCondLst>
+                            <p:childTnLst>
+                              <p:par>
+                                <p:cTn id="77" presetID="1" presetClass="entr" presetSubtype="0" fill="hold" nodeType="clickEffect">
+                                  <p:stCondLst>
+                                    <p:cond delay="0"/>
+                                  </p:stCondLst>
+                                  <p:childTnLst>
+                                    <p:set>
+                                      <p:cBhvr>
+                                        <p:cTn id="78" dur="1" fill="hold">
+                                          <p:stCondLst>
+                                            <p:cond delay="0"/>
+                                          </p:stCondLst>
+                                        </p:cTn>
+                                        <p:tgtEl>
+                                          <p:spTgt spid="15"/>
+                                        </p:tgtEl>
+                                        <p:attrNameLst>
+                                          <p:attrName>style.visibility</p:attrName>
+                                        </p:attrNameLst>
+                                      </p:cBhvr>
+                                      <p:to>
+                                        <p:strVal val="visible"/>
+                                      </p:to>
+                                    </p:set>
+                                  </p:childTnLst>
+                                </p:cTn>
+                              </p:par>
+                            </p:childTnLst>
+                          </p:cTn>
+                        </p:par>
+                      </p:childTnLst>
+                    </p:cTn>
+                  </p:par>
+                  <p:par>
+                    <p:cTn id="79" fill="hold">
+                      <p:stCondLst>
+                        <p:cond delay="indefinite"/>
+                      </p:stCondLst>
+                      <p:childTnLst>
+                        <p:par>
+                          <p:cTn id="80" fill="hold">
+                            <p:stCondLst>
+                              <p:cond delay="0"/>
+                            </p:stCondLst>
+                            <p:childTnLst>
+                              <p:par>
+                                <p:cTn id="81" presetID="1" presetClass="mediacall" presetSubtype="0" fill="hold" nodeType="clickEffect">
+                                  <p:stCondLst>
+                                    <p:cond delay="0"/>
+                                  </p:stCondLst>
+                                  <p:childTnLst>
+                                    <p:cmd type="call" cmd="playFrom(0.0)">
+                                      <p:cBhvr>
+                                        <p:cTn id="82" dur="25322" fill="hold"/>
+                                        <p:tgtEl>
+                                          <p:spTgt spid="15"/>
+                                        </p:tgtEl>
+                                      </p:cBhvr>
+                                    </p:cmd>
+                                  </p:childTnLst>
+                                </p:cTn>
+                              </p:par>
+                            </p:childTnLst>
+                          </p:cTn>
+                        </p:par>
+                      </p:childTnLst>
+                    </p:cTn>
+                  </p:par>
+                </p:childTnLst>
+              </p:cTn>
+              <p:prevCondLst>
+                <p:cond evt="onPrev" delay="0">
+                  <p:tgtEl>
+                    <p:sldTgt/>
+                  </p:tgtEl>
+                </p:cond>
+              </p:prevCondLst>
+              <p:nextCondLst>
+                <p:cond evt="onNext" delay="0">
+                  <p:tgtEl>
+                    <p:sldTgt/>
+                  </p:tgtEl>
+                </p:cond>
+              </p:nextCondLst>
+            </p:seq>
+            <p:video>
+              <p:cMediaNode vol="80000">
+                <p:cTn id="83" fill="hold" display="0">
+                  <p:stCondLst>
+                    <p:cond delay="indefinite"/>
+                  </p:stCondLst>
+                </p:cTn>
+                <p:tgtEl>
+                  <p:spTgt spid="15"/>
+                </p:tgtEl>
+              </p:cMediaNode>
+            </p:video>
+          </p:childTnLst>
+        </p:cTn>
+      </p:par>
+    </p:tnLst>
+    <p:bldLst>
+      <p:bldP spid="5" grpId="0" animBg="1"/>
+      <p:bldP spid="7" grpId="0" animBg="1"/>
+      <p:bldP spid="8" grpId="0"/>
+      <p:bldP spid="9" grpId="0"/>
+      <p:bldP spid="11" grpId="0" animBg="1"/>
+      <p:bldP spid="12" grpId="0"/>
+      <p:bldP spid="13" grpId="0"/>
+    </p:bldLst>
+  </p:timing>
 </p:sld>
 </file>
 
@@ -3881,10 +6524,10 @@
           <a:lstStyle/>
           <a:p>
             <a:r>
-              <a:rPr lang="en-US"/>
-              <a:t>Inventory</a:t>
-            </a:r>
-            <a:endParaRPr lang="en-BE"/>
+              <a:rPr lang="en-US" dirty="0"/>
+              <a:t>Enemy handling</a:t>
+            </a:r>
+            <a:endParaRPr lang="en-BE" dirty="0"/>
           </a:p>
         </p:txBody>
       </p:sp>
@@ -3909,39 +6552,537 @@
           <a:bodyPr/>
           <a:lstStyle/>
           <a:p>
-            <a:r>
-              <a:rPr lang="en-US" i="1" dirty="0">
+            <a:pPr marL="457200" lvl="1" indent="0">
+              <a:buNone/>
+            </a:pPr>
+            <a:r>
+              <a:rPr lang="en-US" sz="3600" dirty="0"/>
+              <a:t>Stored Data</a:t>
+            </a:r>
+          </a:p>
+          <a:p>
+            <a:pPr marL="457200" lvl="1" indent="0">
+              <a:buNone/>
+            </a:pPr>
+            <a:endParaRPr lang="en-US" sz="3600" dirty="0"/>
+          </a:p>
+          <a:p>
+            <a:pPr marL="457200" lvl="1" indent="0">
+              <a:buNone/>
+            </a:pPr>
+            <a:r>
+              <a:rPr lang="en-US" dirty="0"/>
+              <a:t>-Zombies in sight -&gt; Shooting zombies</a:t>
+            </a:r>
+          </a:p>
+          <a:p>
+            <a:pPr marL="457200" lvl="1" indent="0">
+              <a:buNone/>
+            </a:pPr>
+            <a:endParaRPr lang="en-US" dirty="0"/>
+          </a:p>
+          <a:p>
+            <a:pPr marL="457200" lvl="1" indent="0">
+              <a:buNone/>
+            </a:pPr>
+            <a:r>
+              <a:rPr lang="en-US" dirty="0"/>
+              <a:t>-Zombies close -&gt; Fleeing</a:t>
+            </a:r>
+          </a:p>
+          <a:p>
+            <a:pPr marL="457200" lvl="1" indent="0">
+              <a:buNone/>
+            </a:pPr>
+            <a:endParaRPr lang="en-US" sz="2800" dirty="0"/>
+          </a:p>
+        </p:txBody>
+      </p:sp>
+      <p:sp>
+        <p:nvSpPr>
+          <p:cNvPr id="4" name="Rectangle 3">
+            <a:extLst>
+              <a:ext uri="{FF2B5EF4-FFF2-40B4-BE49-F238E27FC236}">
+                <a16:creationId xmlns:a16="http://schemas.microsoft.com/office/drawing/2014/main" id="{C4347D21-7CDE-0DC2-CE2A-7EF791891B2B}"/>
+              </a:ext>
+            </a:extLst>
+          </p:cNvPr>
+          <p:cNvSpPr/>
+          <p:nvPr/>
+        </p:nvSpPr>
+        <p:spPr>
+          <a:xfrm>
+            <a:off x="310896" y="1536192"/>
+            <a:ext cx="11137392" cy="4489704"/>
+          </a:xfrm>
+          <a:prstGeom prst="rect">
+            <a:avLst/>
+          </a:prstGeom>
+          <a:solidFill>
+            <a:schemeClr val="bg1"/>
+          </a:solidFill>
+          <a:ln>
+            <a:solidFill>
+              <a:schemeClr val="bg1"/>
+            </a:solidFill>
+          </a:ln>
+        </p:spPr>
+        <p:style>
+          <a:lnRef idx="2">
+            <a:schemeClr val="accent1">
+              <a:shade val="15000"/>
+            </a:schemeClr>
+          </a:lnRef>
+          <a:fillRef idx="1">
+            <a:schemeClr val="accent1"/>
+          </a:fillRef>
+          <a:effectRef idx="0">
+            <a:schemeClr val="accent1"/>
+          </a:effectRef>
+          <a:fontRef idx="minor">
+            <a:schemeClr val="lt1"/>
+          </a:fontRef>
+        </p:style>
+        <p:txBody>
+          <a:bodyPr rtlCol="0" anchor="ctr"/>
+          <a:lstStyle/>
+          <a:p>
+            <a:pPr algn="ctr"/>
+            <a:endParaRPr lang="en-BE"/>
+          </a:p>
+        </p:txBody>
+      </p:sp>
+      <p:sp>
+        <p:nvSpPr>
+          <p:cNvPr id="5" name="TextBox 4">
+            <a:extLst>
+              <a:ext uri="{FF2B5EF4-FFF2-40B4-BE49-F238E27FC236}">
+                <a16:creationId xmlns:a16="http://schemas.microsoft.com/office/drawing/2014/main" id="{0BF52E3C-62DA-3242-8870-96E633D92475}"/>
+              </a:ext>
+            </a:extLst>
+          </p:cNvPr>
+          <p:cNvSpPr txBox="1"/>
+          <p:nvPr/>
+        </p:nvSpPr>
+        <p:spPr>
+          <a:xfrm>
+            <a:off x="1636776" y="2185416"/>
+            <a:ext cx="7050024" cy="3416320"/>
+          </a:xfrm>
+          <a:prstGeom prst="rect">
+            <a:avLst/>
+          </a:prstGeom>
+          <a:noFill/>
+        </p:spPr>
+        <p:txBody>
+          <a:bodyPr wrap="square" rtlCol="0">
+            <a:spAutoFit/>
+          </a:bodyPr>
+          <a:lstStyle/>
+          <a:p>
+            <a:r>
+              <a:rPr lang="en-US" sz="3600" dirty="0"/>
+              <a:t>Fighting zombies</a:t>
+            </a:r>
+          </a:p>
+          <a:p>
+            <a:r>
+              <a:rPr lang="en-US" sz="3600" dirty="0">
                 <a:solidFill>
-                  <a:schemeClr val="bg1">
-                    <a:lumMod val="75000"/>
-                  </a:schemeClr>
+                  <a:srgbClr val="FF0000"/>
                 </a:solidFill>
               </a:rPr>
-              <a:t>How does your agent manage the inventory (inventory organization, item usage, picking up and remembering items,…)? </a:t>
-            </a:r>
-            <a:endParaRPr lang="en-BE" i="1" dirty="0">
+              <a:t>-Zombie in sight</a:t>
+            </a:r>
+          </a:p>
+          <a:p>
+            <a:r>
+              <a:rPr lang="en-US" sz="3600" dirty="0">
+                <a:solidFill>
+                  <a:srgbClr val="FF0000"/>
+                </a:solidFill>
+              </a:rPr>
+              <a:t>-Have weapon</a:t>
+            </a:r>
+          </a:p>
+          <a:p>
+            <a:endParaRPr lang="en-US" sz="3600" dirty="0">
               <a:solidFill>
-                <a:schemeClr val="bg1">
-                  <a:lumMod val="75000"/>
-                </a:schemeClr>
+                <a:srgbClr val="FF0000"/>
               </a:solidFill>
             </a:endParaRPr>
           </a:p>
           <a:p>
-            <a:endParaRPr lang="en-BE" dirty="0"/>
+            <a:r>
+              <a:rPr lang="en-US" sz="3600" dirty="0">
+                <a:solidFill>
+                  <a:schemeClr val="accent6"/>
+                </a:solidFill>
+              </a:rPr>
+              <a:t>-&gt;Aim at closest zombie</a:t>
+            </a:r>
+          </a:p>
+          <a:p>
+            <a:r>
+              <a:rPr lang="en-US" sz="3600" dirty="0">
+                <a:solidFill>
+                  <a:schemeClr val="accent6"/>
+                </a:solidFill>
+              </a:rPr>
+              <a:t>-&gt;Shoot gun</a:t>
+            </a:r>
+          </a:p>
+        </p:txBody>
+      </p:sp>
+      <p:sp>
+        <p:nvSpPr>
+          <p:cNvPr id="6" name="Rectangle 5">
+            <a:extLst>
+              <a:ext uri="{FF2B5EF4-FFF2-40B4-BE49-F238E27FC236}">
+                <a16:creationId xmlns:a16="http://schemas.microsoft.com/office/drawing/2014/main" id="{3E234EAD-48EA-38BF-15CC-821CA6929883}"/>
+              </a:ext>
+            </a:extLst>
+          </p:cNvPr>
+          <p:cNvSpPr/>
+          <p:nvPr/>
+        </p:nvSpPr>
+        <p:spPr>
+          <a:xfrm>
+            <a:off x="1312164" y="1898777"/>
+            <a:ext cx="9134856" cy="4127119"/>
+          </a:xfrm>
+          <a:prstGeom prst="rect">
+            <a:avLst/>
+          </a:prstGeom>
+          <a:solidFill>
+            <a:schemeClr val="bg1"/>
+          </a:solidFill>
+          <a:ln>
+            <a:solidFill>
+              <a:schemeClr val="bg1"/>
+            </a:solidFill>
+          </a:ln>
+        </p:spPr>
+        <p:style>
+          <a:lnRef idx="2">
+            <a:schemeClr val="accent1">
+              <a:shade val="15000"/>
+            </a:schemeClr>
+          </a:lnRef>
+          <a:fillRef idx="1">
+            <a:schemeClr val="accent1"/>
+          </a:fillRef>
+          <a:effectRef idx="0">
+            <a:schemeClr val="accent1"/>
+          </a:effectRef>
+          <a:fontRef idx="minor">
+            <a:schemeClr val="lt1"/>
+          </a:fontRef>
+        </p:style>
+        <p:txBody>
+          <a:bodyPr rtlCol="0" anchor="ctr"/>
+          <a:lstStyle/>
+          <a:p>
+            <a:pPr algn="ctr"/>
+            <a:endParaRPr lang="en-BE"/>
+          </a:p>
+        </p:txBody>
+      </p:sp>
+      <p:sp>
+        <p:nvSpPr>
+          <p:cNvPr id="7" name="TextBox 6">
+            <a:extLst>
+              <a:ext uri="{FF2B5EF4-FFF2-40B4-BE49-F238E27FC236}">
+                <a16:creationId xmlns:a16="http://schemas.microsoft.com/office/drawing/2014/main" id="{B8111A1C-4CE8-5E7C-C183-69C29F850164}"/>
+              </a:ext>
+            </a:extLst>
+          </p:cNvPr>
+          <p:cNvSpPr txBox="1"/>
+          <p:nvPr/>
+        </p:nvSpPr>
+        <p:spPr>
+          <a:xfrm>
+            <a:off x="1636776" y="2350008"/>
+            <a:ext cx="7296912" cy="3046988"/>
+          </a:xfrm>
+          <a:prstGeom prst="rect">
+            <a:avLst/>
+          </a:prstGeom>
+          <a:noFill/>
+        </p:spPr>
+        <p:txBody>
+          <a:bodyPr wrap="square" rtlCol="0">
+            <a:spAutoFit/>
+          </a:bodyPr>
+          <a:lstStyle/>
+          <a:p>
+            <a:r>
+              <a:rPr lang="en-US" sz="3200" dirty="0"/>
+              <a:t>Flee from zombies</a:t>
+            </a:r>
+          </a:p>
+          <a:p>
+            <a:r>
+              <a:rPr lang="en-US" sz="3200" dirty="0">
+                <a:solidFill>
+                  <a:srgbClr val="FF0000"/>
+                </a:solidFill>
+              </a:rPr>
+              <a:t>-Zombie close</a:t>
+            </a:r>
+          </a:p>
+          <a:p>
+            <a:endParaRPr lang="en-US" sz="3200" dirty="0">
+              <a:solidFill>
+                <a:srgbClr val="FF0000"/>
+              </a:solidFill>
+            </a:endParaRPr>
+          </a:p>
+          <a:p>
+            <a:r>
+              <a:rPr lang="en-US" sz="3200" dirty="0">
+                <a:solidFill>
+                  <a:schemeClr val="accent6"/>
+                </a:solidFill>
+              </a:rPr>
+              <a:t>-Get average zombie location</a:t>
+            </a:r>
+          </a:p>
+          <a:p>
+            <a:r>
+              <a:rPr lang="en-US" sz="3200" dirty="0">
+                <a:solidFill>
+                  <a:schemeClr val="accent6"/>
+                </a:solidFill>
+              </a:rPr>
+              <a:t>-Flee from that location</a:t>
+            </a:r>
+          </a:p>
+          <a:p>
+            <a:r>
+              <a:rPr lang="en-US" sz="3200" dirty="0">
+                <a:solidFill>
+                  <a:schemeClr val="accent6"/>
+                </a:solidFill>
+              </a:rPr>
+              <a:t>-Curved</a:t>
+            </a:r>
+            <a:endParaRPr lang="en-BE" sz="3200" dirty="0">
+              <a:solidFill>
+                <a:schemeClr val="accent6"/>
+              </a:solidFill>
+            </a:endParaRPr>
           </a:p>
         </p:txBody>
       </p:sp>
     </p:spTree>
     <p:extLst>
       <p:ext uri="{BB962C8B-B14F-4D97-AF65-F5344CB8AC3E}">
-        <p14:creationId xmlns:p14="http://schemas.microsoft.com/office/powerpoint/2010/main" val="160499841"/>
+        <p14:creationId xmlns:p14="http://schemas.microsoft.com/office/powerpoint/2010/main" val="3827530984"/>
       </p:ext>
     </p:extLst>
   </p:cSld>
   <p:clrMapOvr>
     <a:masterClrMapping/>
   </p:clrMapOvr>
+  <p:timing>
+    <p:tnLst>
+      <p:par>
+        <p:cTn id="1" dur="indefinite" restart="never" nodeType="tmRoot">
+          <p:childTnLst>
+            <p:seq concurrent="1" nextAc="seek">
+              <p:cTn id="2" dur="indefinite" nodeType="mainSeq">
+                <p:childTnLst>
+                  <p:par>
+                    <p:cTn id="3" fill="hold">
+                      <p:stCondLst>
+                        <p:cond delay="indefinite"/>
+                      </p:stCondLst>
+                      <p:childTnLst>
+                        <p:par>
+                          <p:cTn id="4" fill="hold">
+                            <p:stCondLst>
+                              <p:cond delay="0"/>
+                            </p:stCondLst>
+                            <p:childTnLst>
+                              <p:par>
+                                <p:cTn id="5" presetID="1" presetClass="entr" presetSubtype="0" fill="hold" grpId="0" nodeType="clickEffect">
+                                  <p:stCondLst>
+                                    <p:cond delay="0"/>
+                                  </p:stCondLst>
+                                  <p:childTnLst>
+                                    <p:set>
+                                      <p:cBhvr>
+                                        <p:cTn id="6" dur="1" fill="hold">
+                                          <p:stCondLst>
+                                            <p:cond delay="0"/>
+                                          </p:stCondLst>
+                                        </p:cTn>
+                                        <p:tgtEl>
+                                          <p:spTgt spid="4"/>
+                                        </p:tgtEl>
+                                        <p:attrNameLst>
+                                          <p:attrName>style.visibility</p:attrName>
+                                        </p:attrNameLst>
+                                      </p:cBhvr>
+                                      <p:to>
+                                        <p:strVal val="visible"/>
+                                      </p:to>
+                                    </p:set>
+                                  </p:childTnLst>
+                                </p:cTn>
+                              </p:par>
+                            </p:childTnLst>
+                          </p:cTn>
+                        </p:par>
+                        <p:par>
+                          <p:cTn id="7" fill="hold">
+                            <p:stCondLst>
+                              <p:cond delay="0"/>
+                            </p:stCondLst>
+                            <p:childTnLst>
+                              <p:par>
+                                <p:cTn id="8" presetID="1" presetClass="entr" presetSubtype="0" fill="hold" grpId="0" nodeType="afterEffect">
+                                  <p:stCondLst>
+                                    <p:cond delay="0"/>
+                                  </p:stCondLst>
+                                  <p:childTnLst>
+                                    <p:set>
+                                      <p:cBhvr>
+                                        <p:cTn id="9" dur="1" fill="hold">
+                                          <p:stCondLst>
+                                            <p:cond delay="0"/>
+                                          </p:stCondLst>
+                                        </p:cTn>
+                                        <p:tgtEl>
+                                          <p:spTgt spid="5"/>
+                                        </p:tgtEl>
+                                        <p:attrNameLst>
+                                          <p:attrName>style.visibility</p:attrName>
+                                        </p:attrNameLst>
+                                      </p:cBhvr>
+                                      <p:to>
+                                        <p:strVal val="visible"/>
+                                      </p:to>
+                                    </p:set>
+                                  </p:childTnLst>
+                                </p:cTn>
+                              </p:par>
+                            </p:childTnLst>
+                          </p:cTn>
+                        </p:par>
+                      </p:childTnLst>
+                    </p:cTn>
+                  </p:par>
+                  <p:par>
+                    <p:cTn id="10" fill="hold">
+                      <p:stCondLst>
+                        <p:cond delay="indefinite"/>
+                      </p:stCondLst>
+                      <p:childTnLst>
+                        <p:par>
+                          <p:cTn id="11" fill="hold">
+                            <p:stCondLst>
+                              <p:cond delay="0"/>
+                            </p:stCondLst>
+                            <p:childTnLst>
+                              <p:par>
+                                <p:cTn id="12" presetID="1" presetClass="entr" presetSubtype="0" fill="hold" grpId="0" nodeType="clickEffect">
+                                  <p:stCondLst>
+                                    <p:cond delay="0"/>
+                                  </p:stCondLst>
+                                  <p:childTnLst>
+                                    <p:set>
+                                      <p:cBhvr>
+                                        <p:cTn id="13" dur="1" fill="hold">
+                                          <p:stCondLst>
+                                            <p:cond delay="0"/>
+                                          </p:stCondLst>
+                                        </p:cTn>
+                                        <p:tgtEl>
+                                          <p:spTgt spid="6"/>
+                                        </p:tgtEl>
+                                        <p:attrNameLst>
+                                          <p:attrName>style.visibility</p:attrName>
+                                        </p:attrNameLst>
+                                      </p:cBhvr>
+                                      <p:to>
+                                        <p:strVal val="visible"/>
+                                      </p:to>
+                                    </p:set>
+                                  </p:childTnLst>
+                                </p:cTn>
+                              </p:par>
+                            </p:childTnLst>
+                          </p:cTn>
+                        </p:par>
+                        <p:par>
+                          <p:cTn id="14" fill="hold">
+                            <p:stCondLst>
+                              <p:cond delay="0"/>
+                            </p:stCondLst>
+                            <p:childTnLst>
+                              <p:par>
+                                <p:cTn id="15" presetID="1" presetClass="entr" presetSubtype="0" fill="hold" grpId="0" nodeType="afterEffect">
+                                  <p:stCondLst>
+                                    <p:cond delay="0"/>
+                                  </p:stCondLst>
+                                  <p:childTnLst>
+                                    <p:set>
+                                      <p:cBhvr>
+                                        <p:cTn id="16" dur="1" fill="hold">
+                                          <p:stCondLst>
+                                            <p:cond delay="0"/>
+                                          </p:stCondLst>
+                                        </p:cTn>
+                                        <p:tgtEl>
+                                          <p:spTgt spid="7"/>
+                                        </p:tgtEl>
+                                        <p:attrNameLst>
+                                          <p:attrName>style.visibility</p:attrName>
+                                        </p:attrNameLst>
+                                      </p:cBhvr>
+                                      <p:to>
+                                        <p:strVal val="visible"/>
+                                      </p:to>
+                                    </p:set>
+                                  </p:childTnLst>
+                                </p:cTn>
+                              </p:par>
+                            </p:childTnLst>
+                          </p:cTn>
+                        </p:par>
+                      </p:childTnLst>
+                    </p:cTn>
+                  </p:par>
+                </p:childTnLst>
+              </p:cTn>
+              <p:prevCondLst>
+                <p:cond evt="onPrev" delay="0">
+                  <p:tgtEl>
+                    <p:sldTgt/>
+                  </p:tgtEl>
+                </p:cond>
+              </p:prevCondLst>
+              <p:nextCondLst>
+                <p:cond evt="onNext" delay="0">
+                  <p:tgtEl>
+                    <p:sldTgt/>
+                  </p:tgtEl>
+                </p:cond>
+              </p:nextCondLst>
+            </p:seq>
+          </p:childTnLst>
+        </p:cTn>
+      </p:par>
+    </p:tnLst>
+    <p:bldLst>
+      <p:bldP spid="4" grpId="0" animBg="1"/>
+      <p:bldP spid="5" grpId="0"/>
+      <p:bldP spid="6" grpId="0" animBg="1"/>
+      <p:bldP spid="7" grpId="0"/>
+    </p:bldLst>
+  </p:timing>
 </p:sld>
 </file>
 
@@ -3984,10 +7125,10 @@
           <a:lstStyle/>
           <a:p>
             <a:r>
-              <a:rPr lang="en-US" dirty="0"/>
-              <a:t>Movement - Steering</a:t>
-            </a:r>
-            <a:endParaRPr lang="en-BE" dirty="0"/>
+              <a:rPr lang="en-US"/>
+              <a:t>Inventory</a:t>
+            </a:r>
+            <a:endParaRPr lang="en-BE"/>
           </a:p>
         </p:txBody>
       </p:sp>
@@ -4009,45 +7150,922 @@
         </p:nvSpPr>
         <p:spPr/>
         <p:txBody>
-          <a:bodyPr/>
+          <a:bodyPr>
+            <a:normAutofit/>
+          </a:bodyPr>
           <a:lstStyle/>
-          <a:p>
-            <a:r>
-              <a:rPr lang="en-US" i="1" dirty="0">
-                <a:solidFill>
-                  <a:schemeClr val="bg1">
-                    <a:lumMod val="75000"/>
-                  </a:schemeClr>
-                </a:solidFill>
-              </a:rPr>
-              <a:t>How many steering behaviors does it use? Does it use blended steering?</a:t>
-            </a:r>
-            <a:endParaRPr lang="en-BE" i="1" dirty="0">
-              <a:solidFill>
-                <a:schemeClr val="bg1">
-                  <a:lumMod val="75000"/>
-                </a:schemeClr>
-              </a:solidFill>
-            </a:endParaRPr>
-          </a:p>
           <a:p>
             <a:pPr marL="0" indent="0">
               <a:buNone/>
             </a:pPr>
-            <a:endParaRPr lang="en-BE" dirty="0"/>
+            <a:r>
+              <a:rPr lang="en-US" sz="3600" dirty="0"/>
+              <a:t>Stored Data</a:t>
+            </a:r>
+          </a:p>
+          <a:p>
+            <a:pPr marL="0" indent="0">
+              <a:buNone/>
+            </a:pPr>
+            <a:r>
+              <a:rPr lang="en-US" sz="3600" dirty="0"/>
+              <a:t>-List of items</a:t>
+            </a:r>
+          </a:p>
+          <a:p>
+            <a:pPr marL="0" indent="0">
+              <a:buNone/>
+            </a:pPr>
+            <a:r>
+              <a:rPr lang="en-US" sz="3600" dirty="0"/>
+              <a:t>-Optimal layout</a:t>
+            </a:r>
+          </a:p>
+        </p:txBody>
+      </p:sp>
+      <p:sp>
+        <p:nvSpPr>
+          <p:cNvPr id="4" name="Rectangle 3">
+            <a:extLst>
+              <a:ext uri="{FF2B5EF4-FFF2-40B4-BE49-F238E27FC236}">
+                <a16:creationId xmlns:a16="http://schemas.microsoft.com/office/drawing/2014/main" id="{F1ACB7F4-268C-689F-3D6D-EC9E9FDC6A81}"/>
+              </a:ext>
+            </a:extLst>
+          </p:cNvPr>
+          <p:cNvSpPr/>
+          <p:nvPr/>
+        </p:nvSpPr>
+        <p:spPr>
+          <a:xfrm>
+            <a:off x="548640" y="1554480"/>
+            <a:ext cx="10805160" cy="3602736"/>
+          </a:xfrm>
+          <a:prstGeom prst="rect">
+            <a:avLst/>
+          </a:prstGeom>
+          <a:solidFill>
+            <a:schemeClr val="bg1"/>
+          </a:solidFill>
+          <a:ln>
+            <a:solidFill>
+              <a:schemeClr val="bg1"/>
+            </a:solidFill>
+          </a:ln>
+        </p:spPr>
+        <p:style>
+          <a:lnRef idx="2">
+            <a:schemeClr val="accent1">
+              <a:shade val="15000"/>
+            </a:schemeClr>
+          </a:lnRef>
+          <a:fillRef idx="1">
+            <a:schemeClr val="accent1"/>
+          </a:fillRef>
+          <a:effectRef idx="0">
+            <a:schemeClr val="accent1"/>
+          </a:effectRef>
+          <a:fontRef idx="minor">
+            <a:schemeClr val="lt1"/>
+          </a:fontRef>
+        </p:style>
+        <p:txBody>
+          <a:bodyPr rtlCol="0" anchor="ctr"/>
+          <a:lstStyle/>
+          <a:p>
+            <a:pPr algn="ctr"/>
+            <a:endParaRPr lang="en-BE"/>
+          </a:p>
+        </p:txBody>
+      </p:sp>
+      <p:sp>
+        <p:nvSpPr>
+          <p:cNvPr id="5" name="TextBox 4">
+            <a:extLst>
+              <a:ext uri="{FF2B5EF4-FFF2-40B4-BE49-F238E27FC236}">
+                <a16:creationId xmlns:a16="http://schemas.microsoft.com/office/drawing/2014/main" id="{E59784C3-FA49-0D12-F146-1D625BE38359}"/>
+              </a:ext>
+            </a:extLst>
+          </p:cNvPr>
+          <p:cNvSpPr txBox="1"/>
+          <p:nvPr/>
+        </p:nvSpPr>
+        <p:spPr>
+          <a:xfrm>
+            <a:off x="950976" y="1825625"/>
+            <a:ext cx="5943600" cy="4524315"/>
+          </a:xfrm>
+          <a:prstGeom prst="rect">
+            <a:avLst/>
+          </a:prstGeom>
+          <a:noFill/>
+        </p:spPr>
+        <p:txBody>
+          <a:bodyPr wrap="square" rtlCol="0">
+            <a:spAutoFit/>
+          </a:bodyPr>
+          <a:lstStyle/>
+          <a:p>
+            <a:r>
+              <a:rPr lang="en-US" sz="3200" dirty="0"/>
+              <a:t>Item needed check</a:t>
+            </a:r>
+          </a:p>
+          <a:p>
+            <a:pPr marL="457200" indent="-457200">
+              <a:buFont typeface="Wingdings" panose="05000000000000000000" pitchFamily="2" charset="2"/>
+              <a:buChar char="è"/>
+            </a:pPr>
+            <a:r>
+              <a:rPr lang="en-US" sz="3200" dirty="0"/>
+              <a:t>Inventory full </a:t>
+            </a:r>
+          </a:p>
+          <a:p>
+            <a:pPr marL="457200" indent="-457200">
+              <a:buFont typeface="Wingdings" panose="05000000000000000000" pitchFamily="2" charset="2"/>
+              <a:buChar char="è"/>
+            </a:pPr>
+            <a:r>
+              <a:rPr lang="en-US" sz="3200" dirty="0"/>
+              <a:t>always pick up</a:t>
+            </a:r>
+          </a:p>
+          <a:p>
+            <a:pPr marL="457200" indent="-457200">
+              <a:buFont typeface="Wingdings" panose="05000000000000000000" pitchFamily="2" charset="2"/>
+              <a:buChar char="è"/>
+            </a:pPr>
+            <a:r>
+              <a:rPr lang="en-US" sz="3200" dirty="0"/>
+              <a:t>Item frequency check</a:t>
+            </a:r>
+          </a:p>
+          <a:p>
+            <a:pPr marL="457200" indent="-457200">
+              <a:buFont typeface="Wingdings" panose="05000000000000000000" pitchFamily="2" charset="2"/>
+              <a:buChar char="è"/>
+            </a:pPr>
+            <a:r>
+              <a:rPr lang="en-US" sz="3200" dirty="0"/>
+              <a:t>Get type</a:t>
+            </a:r>
+          </a:p>
+          <a:p>
+            <a:pPr marL="457200" indent="-457200">
+              <a:buFont typeface="Wingdings" panose="05000000000000000000" pitchFamily="2" charset="2"/>
+              <a:buChar char="è"/>
+            </a:pPr>
+            <a:r>
+              <a:rPr lang="en-US" sz="3200" dirty="0"/>
+              <a:t>Check redundant items</a:t>
+            </a:r>
+          </a:p>
+          <a:p>
+            <a:pPr marL="457200" indent="-457200">
+              <a:buFont typeface="Wingdings" panose="05000000000000000000" pitchFamily="2" charset="2"/>
+              <a:buChar char="è"/>
+            </a:pPr>
+            <a:r>
+              <a:rPr lang="en-US" sz="3200" dirty="0"/>
+              <a:t>Compare ammo</a:t>
+            </a:r>
+          </a:p>
+          <a:p>
+            <a:pPr marL="457200" indent="-457200">
+              <a:buFont typeface="Wingdings" panose="05000000000000000000" pitchFamily="2" charset="2"/>
+              <a:buChar char="è"/>
+            </a:pPr>
+            <a:r>
+              <a:rPr lang="en-US" sz="3200" dirty="0"/>
+              <a:t>For all spotted items</a:t>
+            </a:r>
+          </a:p>
+          <a:p>
+            <a:pPr marL="457200" indent="-457200">
+              <a:buFont typeface="Wingdings" panose="05000000000000000000" pitchFamily="2" charset="2"/>
+              <a:buChar char="è"/>
+            </a:pPr>
+            <a:r>
+              <a:rPr lang="en-US" sz="3200" dirty="0"/>
+              <a:t>First needed item</a:t>
+            </a:r>
+          </a:p>
+        </p:txBody>
+      </p:sp>
+      <p:sp>
+        <p:nvSpPr>
+          <p:cNvPr id="8" name="TextBox 7">
+            <a:extLst>
+              <a:ext uri="{FF2B5EF4-FFF2-40B4-BE49-F238E27FC236}">
+                <a16:creationId xmlns:a16="http://schemas.microsoft.com/office/drawing/2014/main" id="{A63FD09A-BF1B-D07E-B98F-8CD012C47679}"/>
+              </a:ext>
+            </a:extLst>
+          </p:cNvPr>
+          <p:cNvSpPr txBox="1"/>
+          <p:nvPr/>
+        </p:nvSpPr>
+        <p:spPr>
+          <a:xfrm>
+            <a:off x="7043928" y="1738896"/>
+            <a:ext cx="4197096" cy="1200329"/>
+          </a:xfrm>
+          <a:prstGeom prst="rect">
+            <a:avLst/>
+          </a:prstGeom>
+          <a:noFill/>
+        </p:spPr>
+        <p:txBody>
+          <a:bodyPr wrap="square" rtlCol="0">
+            <a:spAutoFit/>
+          </a:bodyPr>
+          <a:lstStyle/>
+          <a:p>
+            <a:r>
+              <a:rPr lang="en-US" sz="2400" dirty="0"/>
+              <a:t>Triggers when</a:t>
+            </a:r>
+          </a:p>
+          <a:p>
+            <a:r>
+              <a:rPr lang="en-US" sz="2400" dirty="0"/>
+              <a:t>-&gt;new item sighted</a:t>
+            </a:r>
+          </a:p>
+          <a:p>
+            <a:r>
+              <a:rPr lang="en-US" sz="2400" dirty="0"/>
+              <a:t>-&gt;Inventory changes</a:t>
+            </a:r>
           </a:p>
         </p:txBody>
       </p:sp>
     </p:spTree>
     <p:extLst>
       <p:ext uri="{BB962C8B-B14F-4D97-AF65-F5344CB8AC3E}">
-        <p14:creationId xmlns:p14="http://schemas.microsoft.com/office/powerpoint/2010/main" val="3267762851"/>
+        <p14:creationId xmlns:p14="http://schemas.microsoft.com/office/powerpoint/2010/main" val="160499841"/>
       </p:ext>
     </p:extLst>
   </p:cSld>
   <p:clrMapOvr>
     <a:masterClrMapping/>
   </p:clrMapOvr>
+  <p:timing>
+    <p:tnLst>
+      <p:par>
+        <p:cTn id="1" dur="indefinite" restart="never" nodeType="tmRoot">
+          <p:childTnLst>
+            <p:seq concurrent="1" nextAc="seek">
+              <p:cTn id="2" dur="indefinite" nodeType="mainSeq">
+                <p:childTnLst>
+                  <p:par>
+                    <p:cTn id="3" fill="hold">
+                      <p:stCondLst>
+                        <p:cond delay="indefinite"/>
+                      </p:stCondLst>
+                      <p:childTnLst>
+                        <p:par>
+                          <p:cTn id="4" fill="hold">
+                            <p:stCondLst>
+                              <p:cond delay="0"/>
+                            </p:stCondLst>
+                            <p:childTnLst>
+                              <p:par>
+                                <p:cTn id="5" presetID="1" presetClass="entr" presetSubtype="0" fill="hold" grpId="0" nodeType="clickEffect">
+                                  <p:stCondLst>
+                                    <p:cond delay="0"/>
+                                  </p:stCondLst>
+                                  <p:childTnLst>
+                                    <p:set>
+                                      <p:cBhvr>
+                                        <p:cTn id="6" dur="1" fill="hold">
+                                          <p:stCondLst>
+                                            <p:cond delay="0"/>
+                                          </p:stCondLst>
+                                        </p:cTn>
+                                        <p:tgtEl>
+                                          <p:spTgt spid="4"/>
+                                        </p:tgtEl>
+                                        <p:attrNameLst>
+                                          <p:attrName>style.visibility</p:attrName>
+                                        </p:attrNameLst>
+                                      </p:cBhvr>
+                                      <p:to>
+                                        <p:strVal val="visible"/>
+                                      </p:to>
+                                    </p:set>
+                                  </p:childTnLst>
+                                </p:cTn>
+                              </p:par>
+                            </p:childTnLst>
+                          </p:cTn>
+                        </p:par>
+                        <p:par>
+                          <p:cTn id="7" fill="hold">
+                            <p:stCondLst>
+                              <p:cond delay="0"/>
+                            </p:stCondLst>
+                            <p:childTnLst>
+                              <p:par>
+                                <p:cTn id="8" presetID="1" presetClass="entr" presetSubtype="0" fill="hold" nodeType="afterEffect">
+                                  <p:stCondLst>
+                                    <p:cond delay="0"/>
+                                  </p:stCondLst>
+                                  <p:childTnLst>
+                                    <p:set>
+                                      <p:cBhvr>
+                                        <p:cTn id="9" dur="1" fill="hold">
+                                          <p:stCondLst>
+                                            <p:cond delay="0"/>
+                                          </p:stCondLst>
+                                        </p:cTn>
+                                        <p:tgtEl>
+                                          <p:spTgt spid="5">
+                                            <p:txEl>
+                                              <p:pRg st="0" end="0"/>
+                                            </p:txEl>
+                                          </p:spTgt>
+                                        </p:tgtEl>
+                                        <p:attrNameLst>
+                                          <p:attrName>style.visibility</p:attrName>
+                                        </p:attrNameLst>
+                                      </p:cBhvr>
+                                      <p:to>
+                                        <p:strVal val="visible"/>
+                                      </p:to>
+                                    </p:set>
+                                  </p:childTnLst>
+                                </p:cTn>
+                              </p:par>
+                            </p:childTnLst>
+                          </p:cTn>
+                        </p:par>
+                      </p:childTnLst>
+                    </p:cTn>
+                  </p:par>
+                  <p:par>
+                    <p:cTn id="10" fill="hold">
+                      <p:stCondLst>
+                        <p:cond delay="indefinite"/>
+                      </p:stCondLst>
+                      <p:childTnLst>
+                        <p:par>
+                          <p:cTn id="11" fill="hold">
+                            <p:stCondLst>
+                              <p:cond delay="0"/>
+                            </p:stCondLst>
+                            <p:childTnLst>
+                              <p:par>
+                                <p:cTn id="12" presetID="1" presetClass="entr" presetSubtype="0" fill="hold" nodeType="clickEffect">
+                                  <p:stCondLst>
+                                    <p:cond delay="0"/>
+                                  </p:stCondLst>
+                                  <p:childTnLst>
+                                    <p:set>
+                                      <p:cBhvr>
+                                        <p:cTn id="13" dur="1" fill="hold">
+                                          <p:stCondLst>
+                                            <p:cond delay="0"/>
+                                          </p:stCondLst>
+                                        </p:cTn>
+                                        <p:tgtEl>
+                                          <p:spTgt spid="5">
+                                            <p:txEl>
+                                              <p:pRg st="1" end="1"/>
+                                            </p:txEl>
+                                          </p:spTgt>
+                                        </p:tgtEl>
+                                        <p:attrNameLst>
+                                          <p:attrName>style.visibility</p:attrName>
+                                        </p:attrNameLst>
+                                      </p:cBhvr>
+                                      <p:to>
+                                        <p:strVal val="visible"/>
+                                      </p:to>
+                                    </p:set>
+                                  </p:childTnLst>
+                                </p:cTn>
+                              </p:par>
+                            </p:childTnLst>
+                          </p:cTn>
+                        </p:par>
+                      </p:childTnLst>
+                    </p:cTn>
+                  </p:par>
+                  <p:par>
+                    <p:cTn id="14" fill="hold">
+                      <p:stCondLst>
+                        <p:cond delay="indefinite"/>
+                      </p:stCondLst>
+                      <p:childTnLst>
+                        <p:par>
+                          <p:cTn id="15" fill="hold">
+                            <p:stCondLst>
+                              <p:cond delay="0"/>
+                            </p:stCondLst>
+                            <p:childTnLst>
+                              <p:par>
+                                <p:cTn id="16" presetID="1" presetClass="entr" presetSubtype="0" fill="hold" nodeType="clickEffect">
+                                  <p:stCondLst>
+                                    <p:cond delay="0"/>
+                                  </p:stCondLst>
+                                  <p:childTnLst>
+                                    <p:set>
+                                      <p:cBhvr>
+                                        <p:cTn id="17" dur="1" fill="hold">
+                                          <p:stCondLst>
+                                            <p:cond delay="0"/>
+                                          </p:stCondLst>
+                                        </p:cTn>
+                                        <p:tgtEl>
+                                          <p:spTgt spid="5">
+                                            <p:txEl>
+                                              <p:pRg st="2" end="2"/>
+                                            </p:txEl>
+                                          </p:spTgt>
+                                        </p:tgtEl>
+                                        <p:attrNameLst>
+                                          <p:attrName>style.visibility</p:attrName>
+                                        </p:attrNameLst>
+                                      </p:cBhvr>
+                                      <p:to>
+                                        <p:strVal val="visible"/>
+                                      </p:to>
+                                    </p:set>
+                                  </p:childTnLst>
+                                </p:cTn>
+                              </p:par>
+                            </p:childTnLst>
+                          </p:cTn>
+                        </p:par>
+                      </p:childTnLst>
+                    </p:cTn>
+                  </p:par>
+                  <p:par>
+                    <p:cTn id="18" fill="hold">
+                      <p:stCondLst>
+                        <p:cond delay="indefinite"/>
+                      </p:stCondLst>
+                      <p:childTnLst>
+                        <p:par>
+                          <p:cTn id="19" fill="hold">
+                            <p:stCondLst>
+                              <p:cond delay="0"/>
+                            </p:stCondLst>
+                            <p:childTnLst>
+                              <p:par>
+                                <p:cTn id="20" presetID="1" presetClass="entr" presetSubtype="0" fill="hold" nodeType="clickEffect">
+                                  <p:stCondLst>
+                                    <p:cond delay="0"/>
+                                  </p:stCondLst>
+                                  <p:childTnLst>
+                                    <p:set>
+                                      <p:cBhvr>
+                                        <p:cTn id="21" dur="1" fill="hold">
+                                          <p:stCondLst>
+                                            <p:cond delay="0"/>
+                                          </p:stCondLst>
+                                        </p:cTn>
+                                        <p:tgtEl>
+                                          <p:spTgt spid="5">
+                                            <p:txEl>
+                                              <p:pRg st="3" end="3"/>
+                                            </p:txEl>
+                                          </p:spTgt>
+                                        </p:tgtEl>
+                                        <p:attrNameLst>
+                                          <p:attrName>style.visibility</p:attrName>
+                                        </p:attrNameLst>
+                                      </p:cBhvr>
+                                      <p:to>
+                                        <p:strVal val="visible"/>
+                                      </p:to>
+                                    </p:set>
+                                  </p:childTnLst>
+                                </p:cTn>
+                              </p:par>
+                            </p:childTnLst>
+                          </p:cTn>
+                        </p:par>
+                      </p:childTnLst>
+                    </p:cTn>
+                  </p:par>
+                  <p:par>
+                    <p:cTn id="22" fill="hold">
+                      <p:stCondLst>
+                        <p:cond delay="indefinite"/>
+                      </p:stCondLst>
+                      <p:childTnLst>
+                        <p:par>
+                          <p:cTn id="23" fill="hold">
+                            <p:stCondLst>
+                              <p:cond delay="0"/>
+                            </p:stCondLst>
+                            <p:childTnLst>
+                              <p:par>
+                                <p:cTn id="24" presetID="1" presetClass="entr" presetSubtype="0" fill="hold" nodeType="clickEffect">
+                                  <p:stCondLst>
+                                    <p:cond delay="0"/>
+                                  </p:stCondLst>
+                                  <p:childTnLst>
+                                    <p:set>
+                                      <p:cBhvr>
+                                        <p:cTn id="25" dur="1" fill="hold">
+                                          <p:stCondLst>
+                                            <p:cond delay="0"/>
+                                          </p:stCondLst>
+                                        </p:cTn>
+                                        <p:tgtEl>
+                                          <p:spTgt spid="5">
+                                            <p:txEl>
+                                              <p:pRg st="4" end="4"/>
+                                            </p:txEl>
+                                          </p:spTgt>
+                                        </p:tgtEl>
+                                        <p:attrNameLst>
+                                          <p:attrName>style.visibility</p:attrName>
+                                        </p:attrNameLst>
+                                      </p:cBhvr>
+                                      <p:to>
+                                        <p:strVal val="visible"/>
+                                      </p:to>
+                                    </p:set>
+                                  </p:childTnLst>
+                                </p:cTn>
+                              </p:par>
+                            </p:childTnLst>
+                          </p:cTn>
+                        </p:par>
+                      </p:childTnLst>
+                    </p:cTn>
+                  </p:par>
+                  <p:par>
+                    <p:cTn id="26" fill="hold">
+                      <p:stCondLst>
+                        <p:cond delay="indefinite"/>
+                      </p:stCondLst>
+                      <p:childTnLst>
+                        <p:par>
+                          <p:cTn id="27" fill="hold">
+                            <p:stCondLst>
+                              <p:cond delay="0"/>
+                            </p:stCondLst>
+                            <p:childTnLst>
+                              <p:par>
+                                <p:cTn id="28" presetID="1" presetClass="entr" presetSubtype="0" fill="hold" nodeType="clickEffect">
+                                  <p:stCondLst>
+                                    <p:cond delay="0"/>
+                                  </p:stCondLst>
+                                  <p:childTnLst>
+                                    <p:set>
+                                      <p:cBhvr>
+                                        <p:cTn id="29" dur="1" fill="hold">
+                                          <p:stCondLst>
+                                            <p:cond delay="0"/>
+                                          </p:stCondLst>
+                                        </p:cTn>
+                                        <p:tgtEl>
+                                          <p:spTgt spid="5">
+                                            <p:txEl>
+                                              <p:pRg st="5" end="5"/>
+                                            </p:txEl>
+                                          </p:spTgt>
+                                        </p:tgtEl>
+                                        <p:attrNameLst>
+                                          <p:attrName>style.visibility</p:attrName>
+                                        </p:attrNameLst>
+                                      </p:cBhvr>
+                                      <p:to>
+                                        <p:strVal val="visible"/>
+                                      </p:to>
+                                    </p:set>
+                                  </p:childTnLst>
+                                </p:cTn>
+                              </p:par>
+                            </p:childTnLst>
+                          </p:cTn>
+                        </p:par>
+                      </p:childTnLst>
+                    </p:cTn>
+                  </p:par>
+                  <p:par>
+                    <p:cTn id="30" fill="hold">
+                      <p:stCondLst>
+                        <p:cond delay="indefinite"/>
+                      </p:stCondLst>
+                      <p:childTnLst>
+                        <p:par>
+                          <p:cTn id="31" fill="hold">
+                            <p:stCondLst>
+                              <p:cond delay="0"/>
+                            </p:stCondLst>
+                            <p:childTnLst>
+                              <p:par>
+                                <p:cTn id="32" presetID="1" presetClass="entr" presetSubtype="0" fill="hold" nodeType="clickEffect">
+                                  <p:stCondLst>
+                                    <p:cond delay="0"/>
+                                  </p:stCondLst>
+                                  <p:childTnLst>
+                                    <p:set>
+                                      <p:cBhvr>
+                                        <p:cTn id="33" dur="1" fill="hold">
+                                          <p:stCondLst>
+                                            <p:cond delay="0"/>
+                                          </p:stCondLst>
+                                        </p:cTn>
+                                        <p:tgtEl>
+                                          <p:spTgt spid="5">
+                                            <p:txEl>
+                                              <p:pRg st="6" end="6"/>
+                                            </p:txEl>
+                                          </p:spTgt>
+                                        </p:tgtEl>
+                                        <p:attrNameLst>
+                                          <p:attrName>style.visibility</p:attrName>
+                                        </p:attrNameLst>
+                                      </p:cBhvr>
+                                      <p:to>
+                                        <p:strVal val="visible"/>
+                                      </p:to>
+                                    </p:set>
+                                  </p:childTnLst>
+                                </p:cTn>
+                              </p:par>
+                            </p:childTnLst>
+                          </p:cTn>
+                        </p:par>
+                      </p:childTnLst>
+                    </p:cTn>
+                  </p:par>
+                  <p:par>
+                    <p:cTn id="34" fill="hold">
+                      <p:stCondLst>
+                        <p:cond delay="indefinite"/>
+                      </p:stCondLst>
+                      <p:childTnLst>
+                        <p:par>
+                          <p:cTn id="35" fill="hold">
+                            <p:stCondLst>
+                              <p:cond delay="0"/>
+                            </p:stCondLst>
+                            <p:childTnLst>
+                              <p:par>
+                                <p:cTn id="36" presetID="1" presetClass="entr" presetSubtype="0" fill="hold" nodeType="clickEffect">
+                                  <p:stCondLst>
+                                    <p:cond delay="0"/>
+                                  </p:stCondLst>
+                                  <p:childTnLst>
+                                    <p:set>
+                                      <p:cBhvr>
+                                        <p:cTn id="37" dur="1" fill="hold">
+                                          <p:stCondLst>
+                                            <p:cond delay="0"/>
+                                          </p:stCondLst>
+                                        </p:cTn>
+                                        <p:tgtEl>
+                                          <p:spTgt spid="5">
+                                            <p:txEl>
+                                              <p:pRg st="7" end="7"/>
+                                            </p:txEl>
+                                          </p:spTgt>
+                                        </p:tgtEl>
+                                        <p:attrNameLst>
+                                          <p:attrName>style.visibility</p:attrName>
+                                        </p:attrNameLst>
+                                      </p:cBhvr>
+                                      <p:to>
+                                        <p:strVal val="visible"/>
+                                      </p:to>
+                                    </p:set>
+                                  </p:childTnLst>
+                                </p:cTn>
+                              </p:par>
+                            </p:childTnLst>
+                          </p:cTn>
+                        </p:par>
+                      </p:childTnLst>
+                    </p:cTn>
+                  </p:par>
+                  <p:par>
+                    <p:cTn id="38" fill="hold">
+                      <p:stCondLst>
+                        <p:cond delay="indefinite"/>
+                      </p:stCondLst>
+                      <p:childTnLst>
+                        <p:par>
+                          <p:cTn id="39" fill="hold">
+                            <p:stCondLst>
+                              <p:cond delay="0"/>
+                            </p:stCondLst>
+                            <p:childTnLst>
+                              <p:par>
+                                <p:cTn id="40" presetID="1" presetClass="entr" presetSubtype="0" fill="hold" nodeType="clickEffect">
+                                  <p:stCondLst>
+                                    <p:cond delay="0"/>
+                                  </p:stCondLst>
+                                  <p:childTnLst>
+                                    <p:set>
+                                      <p:cBhvr>
+                                        <p:cTn id="41" dur="1" fill="hold">
+                                          <p:stCondLst>
+                                            <p:cond delay="0"/>
+                                          </p:stCondLst>
+                                        </p:cTn>
+                                        <p:tgtEl>
+                                          <p:spTgt spid="5">
+                                            <p:txEl>
+                                              <p:pRg st="8" end="8"/>
+                                            </p:txEl>
+                                          </p:spTgt>
+                                        </p:tgtEl>
+                                        <p:attrNameLst>
+                                          <p:attrName>style.visibility</p:attrName>
+                                        </p:attrNameLst>
+                                      </p:cBhvr>
+                                      <p:to>
+                                        <p:strVal val="visible"/>
+                                      </p:to>
+                                    </p:set>
+                                  </p:childTnLst>
+                                </p:cTn>
+                              </p:par>
+                            </p:childTnLst>
+                          </p:cTn>
+                        </p:par>
+                      </p:childTnLst>
+                    </p:cTn>
+                  </p:par>
+                  <p:par>
+                    <p:cTn id="42" fill="hold">
+                      <p:stCondLst>
+                        <p:cond delay="indefinite"/>
+                      </p:stCondLst>
+                      <p:childTnLst>
+                        <p:par>
+                          <p:cTn id="43" fill="hold">
+                            <p:stCondLst>
+                              <p:cond delay="0"/>
+                            </p:stCondLst>
+                            <p:childTnLst>
+                              <p:par>
+                                <p:cTn id="44" presetID="1" presetClass="entr" presetSubtype="0" fill="hold" nodeType="clickEffect">
+                                  <p:stCondLst>
+                                    <p:cond delay="0"/>
+                                  </p:stCondLst>
+                                  <p:childTnLst>
+                                    <p:set>
+                                      <p:cBhvr>
+                                        <p:cTn id="45" dur="1" fill="hold">
+                                          <p:stCondLst>
+                                            <p:cond delay="0"/>
+                                          </p:stCondLst>
+                                        </p:cTn>
+                                        <p:tgtEl>
+                                          <p:spTgt spid="8">
+                                            <p:txEl>
+                                              <p:pRg st="0" end="0"/>
+                                            </p:txEl>
+                                          </p:spTgt>
+                                        </p:tgtEl>
+                                        <p:attrNameLst>
+                                          <p:attrName>style.visibility</p:attrName>
+                                        </p:attrNameLst>
+                                      </p:cBhvr>
+                                      <p:to>
+                                        <p:strVal val="visible"/>
+                                      </p:to>
+                                    </p:set>
+                                  </p:childTnLst>
+                                </p:cTn>
+                              </p:par>
+                            </p:childTnLst>
+                          </p:cTn>
+                        </p:par>
+                      </p:childTnLst>
+                    </p:cTn>
+                  </p:par>
+                  <p:par>
+                    <p:cTn id="46" fill="hold">
+                      <p:stCondLst>
+                        <p:cond delay="indefinite"/>
+                      </p:stCondLst>
+                      <p:childTnLst>
+                        <p:par>
+                          <p:cTn id="47" fill="hold">
+                            <p:stCondLst>
+                              <p:cond delay="0"/>
+                            </p:stCondLst>
+                            <p:childTnLst>
+                              <p:par>
+                                <p:cTn id="48" presetID="1" presetClass="entr" presetSubtype="0" fill="hold" nodeType="clickEffect">
+                                  <p:stCondLst>
+                                    <p:cond delay="0"/>
+                                  </p:stCondLst>
+                                  <p:childTnLst>
+                                    <p:set>
+                                      <p:cBhvr>
+                                        <p:cTn id="49" dur="1" fill="hold">
+                                          <p:stCondLst>
+                                            <p:cond delay="0"/>
+                                          </p:stCondLst>
+                                        </p:cTn>
+                                        <p:tgtEl>
+                                          <p:spTgt spid="8">
+                                            <p:txEl>
+                                              <p:pRg st="1" end="1"/>
+                                            </p:txEl>
+                                          </p:spTgt>
+                                        </p:tgtEl>
+                                        <p:attrNameLst>
+                                          <p:attrName>style.visibility</p:attrName>
+                                        </p:attrNameLst>
+                                      </p:cBhvr>
+                                      <p:to>
+                                        <p:strVal val="visible"/>
+                                      </p:to>
+                                    </p:set>
+                                  </p:childTnLst>
+                                </p:cTn>
+                              </p:par>
+                            </p:childTnLst>
+                          </p:cTn>
+                        </p:par>
+                      </p:childTnLst>
+                    </p:cTn>
+                  </p:par>
+                  <p:par>
+                    <p:cTn id="50" fill="hold">
+                      <p:stCondLst>
+                        <p:cond delay="indefinite"/>
+                      </p:stCondLst>
+                      <p:childTnLst>
+                        <p:par>
+                          <p:cTn id="51" fill="hold">
+                            <p:stCondLst>
+                              <p:cond delay="0"/>
+                            </p:stCondLst>
+                            <p:childTnLst>
+                              <p:par>
+                                <p:cTn id="52" presetID="1" presetClass="entr" presetSubtype="0" fill="hold" nodeType="clickEffect">
+                                  <p:stCondLst>
+                                    <p:cond delay="0"/>
+                                  </p:stCondLst>
+                                  <p:childTnLst>
+                                    <p:set>
+                                      <p:cBhvr>
+                                        <p:cTn id="53" dur="1" fill="hold">
+                                          <p:stCondLst>
+                                            <p:cond delay="0"/>
+                                          </p:stCondLst>
+                                        </p:cTn>
+                                        <p:tgtEl>
+                                          <p:spTgt spid="8">
+                                            <p:txEl>
+                                              <p:pRg st="2" end="2"/>
+                                            </p:txEl>
+                                          </p:spTgt>
+                                        </p:tgtEl>
+                                        <p:attrNameLst>
+                                          <p:attrName>style.visibility</p:attrName>
+                                        </p:attrNameLst>
+                                      </p:cBhvr>
+                                      <p:to>
+                                        <p:strVal val="visible"/>
+                                      </p:to>
+                                    </p:set>
+                                  </p:childTnLst>
+                                </p:cTn>
+                              </p:par>
+                            </p:childTnLst>
+                          </p:cTn>
+                        </p:par>
+                      </p:childTnLst>
+                    </p:cTn>
+                  </p:par>
+                </p:childTnLst>
+              </p:cTn>
+              <p:prevCondLst>
+                <p:cond evt="onPrev" delay="0">
+                  <p:tgtEl>
+                    <p:sldTgt/>
+                  </p:tgtEl>
+                </p:cond>
+              </p:prevCondLst>
+              <p:nextCondLst>
+                <p:cond evt="onNext" delay="0">
+                  <p:tgtEl>
+                    <p:sldTgt/>
+                  </p:tgtEl>
+                </p:cond>
+              </p:nextCondLst>
+            </p:seq>
+          </p:childTnLst>
+        </p:cTn>
+      </p:par>
+    </p:tnLst>
+    <p:bldLst>
+      <p:bldP spid="4" grpId="0" animBg="1"/>
+    </p:bldLst>
+  </p:timing>
 </p:sld>
 </file>
 
@@ -4091,11 +8109,7 @@
           <a:p>
             <a:r>
               <a:rPr lang="en-US" dirty="0"/>
-              <a:t>Movement </a:t>
-            </a:r>
-            <a:r>
-              <a:rPr lang="en-US"/>
-              <a:t>- Exploration</a:t>
+              <a:t>Movement - Steering</a:t>
             </a:r>
             <a:endParaRPr lang="en-BE" dirty="0"/>
           </a:p>
@@ -4123,27 +8137,44 @@
           <a:lstStyle/>
           <a:p>
             <a:r>
-              <a:rPr lang="en-US" i="1" dirty="0">
-                <a:solidFill>
-                  <a:schemeClr val="bg1">
-                    <a:lumMod val="75000"/>
-                  </a:schemeClr>
-                </a:solidFill>
-              </a:rPr>
-              <a:t>How does your agent explore the world ( how does it traverse the world, when and why does it visit houses, does it have a memory?)?</a:t>
-            </a:r>
-          </a:p>
-          <a:p>
-            <a:r>
-              <a:rPr lang="en-US" i="1" dirty="0">
-                <a:solidFill>
-                  <a:schemeClr val="bg1">
-                    <a:lumMod val="75000"/>
-                  </a:schemeClr>
-                </a:solidFill>
-              </a:rPr>
-              <a:t>USE IMAGES/GIFS</a:t>
-            </a:r>
+              <a:rPr lang="en-US" dirty="0"/>
+              <a:t>Aiming -&gt; Face</a:t>
+            </a:r>
+          </a:p>
+          <a:p>
+            <a:r>
+              <a:rPr lang="en-US" dirty="0"/>
+              <a:t>Rotating -&gt; Face</a:t>
+            </a:r>
+          </a:p>
+          <a:p>
+            <a:r>
+              <a:rPr lang="en-US" dirty="0"/>
+              <a:t>Spiraling -&gt; </a:t>
+            </a:r>
+            <a:r>
+              <a:rPr lang="en-US" dirty="0" err="1"/>
+              <a:t>Pathfollow</a:t>
+            </a:r>
+            <a:endParaRPr lang="en-US" dirty="0"/>
+          </a:p>
+          <a:p>
+            <a:r>
+              <a:rPr lang="en-US" dirty="0"/>
+              <a:t>Exploring house -&gt; Seek</a:t>
+            </a:r>
+          </a:p>
+          <a:p>
+            <a:r>
+              <a:rPr lang="en-US" dirty="0"/>
+              <a:t>Running from zombie -&gt; Custom flee</a:t>
+            </a:r>
+          </a:p>
+          <a:p>
+            <a:endParaRPr lang="en-US" dirty="0"/>
+          </a:p>
+          <a:p>
+            <a:endParaRPr lang="en-BE" dirty="0"/>
           </a:p>
           <a:p>
             <a:pPr marL="0" indent="0">
@@ -4156,13 +8187,288 @@
     </p:spTree>
     <p:extLst>
       <p:ext uri="{BB962C8B-B14F-4D97-AF65-F5344CB8AC3E}">
-        <p14:creationId xmlns:p14="http://schemas.microsoft.com/office/powerpoint/2010/main" val="1652142467"/>
+        <p14:creationId xmlns:p14="http://schemas.microsoft.com/office/powerpoint/2010/main" val="3267762851"/>
       </p:ext>
     </p:extLst>
   </p:cSld>
   <p:clrMapOvr>
     <a:masterClrMapping/>
   </p:clrMapOvr>
+  <p:timing>
+    <p:tnLst>
+      <p:par>
+        <p:cTn id="1" dur="indefinite" restart="never" nodeType="tmRoot">
+          <p:childTnLst>
+            <p:seq concurrent="1" nextAc="seek">
+              <p:cTn id="2" dur="indefinite" nodeType="mainSeq">
+                <p:childTnLst>
+                  <p:par>
+                    <p:cTn id="3" fill="hold">
+                      <p:stCondLst>
+                        <p:cond delay="indefinite"/>
+                      </p:stCondLst>
+                      <p:childTnLst>
+                        <p:par>
+                          <p:cTn id="4" fill="hold">
+                            <p:stCondLst>
+                              <p:cond delay="0"/>
+                            </p:stCondLst>
+                            <p:childTnLst>
+                              <p:par>
+                                <p:cTn id="5" presetID="1" presetClass="entr" presetSubtype="0" fill="hold" nodeType="clickEffect">
+                                  <p:stCondLst>
+                                    <p:cond delay="0"/>
+                                  </p:stCondLst>
+                                  <p:childTnLst>
+                                    <p:set>
+                                      <p:cBhvr>
+                                        <p:cTn id="6" dur="1" fill="hold">
+                                          <p:stCondLst>
+                                            <p:cond delay="0"/>
+                                          </p:stCondLst>
+                                        </p:cTn>
+                                        <p:tgtEl>
+                                          <p:spTgt spid="3">
+                                            <p:txEl>
+                                              <p:pRg st="0" end="0"/>
+                                            </p:txEl>
+                                          </p:spTgt>
+                                        </p:tgtEl>
+                                        <p:attrNameLst>
+                                          <p:attrName>style.visibility</p:attrName>
+                                        </p:attrNameLst>
+                                      </p:cBhvr>
+                                      <p:to>
+                                        <p:strVal val="visible"/>
+                                      </p:to>
+                                    </p:set>
+                                  </p:childTnLst>
+                                </p:cTn>
+                              </p:par>
+                            </p:childTnLst>
+                          </p:cTn>
+                        </p:par>
+                      </p:childTnLst>
+                    </p:cTn>
+                  </p:par>
+                  <p:par>
+                    <p:cTn id="7" fill="hold">
+                      <p:stCondLst>
+                        <p:cond delay="indefinite"/>
+                      </p:stCondLst>
+                      <p:childTnLst>
+                        <p:par>
+                          <p:cTn id="8" fill="hold">
+                            <p:stCondLst>
+                              <p:cond delay="0"/>
+                            </p:stCondLst>
+                            <p:childTnLst>
+                              <p:par>
+                                <p:cTn id="9" presetID="1" presetClass="entr" presetSubtype="0" fill="hold" nodeType="clickEffect">
+                                  <p:stCondLst>
+                                    <p:cond delay="0"/>
+                                  </p:stCondLst>
+                                  <p:childTnLst>
+                                    <p:set>
+                                      <p:cBhvr>
+                                        <p:cTn id="10" dur="1" fill="hold">
+                                          <p:stCondLst>
+                                            <p:cond delay="0"/>
+                                          </p:stCondLst>
+                                        </p:cTn>
+                                        <p:tgtEl>
+                                          <p:spTgt spid="3">
+                                            <p:txEl>
+                                              <p:pRg st="1" end="1"/>
+                                            </p:txEl>
+                                          </p:spTgt>
+                                        </p:tgtEl>
+                                        <p:attrNameLst>
+                                          <p:attrName>style.visibility</p:attrName>
+                                        </p:attrNameLst>
+                                      </p:cBhvr>
+                                      <p:to>
+                                        <p:strVal val="visible"/>
+                                      </p:to>
+                                    </p:set>
+                                  </p:childTnLst>
+                                </p:cTn>
+                              </p:par>
+                            </p:childTnLst>
+                          </p:cTn>
+                        </p:par>
+                      </p:childTnLst>
+                    </p:cTn>
+                  </p:par>
+                  <p:par>
+                    <p:cTn id="11" fill="hold">
+                      <p:stCondLst>
+                        <p:cond delay="indefinite"/>
+                      </p:stCondLst>
+                      <p:childTnLst>
+                        <p:par>
+                          <p:cTn id="12" fill="hold">
+                            <p:stCondLst>
+                              <p:cond delay="0"/>
+                            </p:stCondLst>
+                            <p:childTnLst>
+                              <p:par>
+                                <p:cTn id="13" presetID="1" presetClass="entr" presetSubtype="0" fill="hold" nodeType="clickEffect">
+                                  <p:stCondLst>
+                                    <p:cond delay="0"/>
+                                  </p:stCondLst>
+                                  <p:childTnLst>
+                                    <p:set>
+                                      <p:cBhvr>
+                                        <p:cTn id="14" dur="1" fill="hold">
+                                          <p:stCondLst>
+                                            <p:cond delay="0"/>
+                                          </p:stCondLst>
+                                        </p:cTn>
+                                        <p:tgtEl>
+                                          <p:spTgt spid="3">
+                                            <p:txEl>
+                                              <p:pRg st="2" end="2"/>
+                                            </p:txEl>
+                                          </p:spTgt>
+                                        </p:tgtEl>
+                                        <p:attrNameLst>
+                                          <p:attrName>style.visibility</p:attrName>
+                                        </p:attrNameLst>
+                                      </p:cBhvr>
+                                      <p:to>
+                                        <p:strVal val="visible"/>
+                                      </p:to>
+                                    </p:set>
+                                  </p:childTnLst>
+                                </p:cTn>
+                              </p:par>
+                            </p:childTnLst>
+                          </p:cTn>
+                        </p:par>
+                      </p:childTnLst>
+                    </p:cTn>
+                  </p:par>
+                  <p:par>
+                    <p:cTn id="15" fill="hold">
+                      <p:stCondLst>
+                        <p:cond delay="indefinite"/>
+                      </p:stCondLst>
+                      <p:childTnLst>
+                        <p:par>
+                          <p:cTn id="16" fill="hold">
+                            <p:stCondLst>
+                              <p:cond delay="0"/>
+                            </p:stCondLst>
+                            <p:childTnLst>
+                              <p:par>
+                                <p:cTn id="17" presetID="1" presetClass="entr" presetSubtype="0" fill="hold" nodeType="clickEffect">
+                                  <p:stCondLst>
+                                    <p:cond delay="0"/>
+                                  </p:stCondLst>
+                                  <p:childTnLst>
+                                    <p:set>
+                                      <p:cBhvr>
+                                        <p:cTn id="18" dur="1" fill="hold">
+                                          <p:stCondLst>
+                                            <p:cond delay="0"/>
+                                          </p:stCondLst>
+                                        </p:cTn>
+                                        <p:tgtEl>
+                                          <p:spTgt spid="3">
+                                            <p:txEl>
+                                              <p:pRg st="3" end="3"/>
+                                            </p:txEl>
+                                          </p:spTgt>
+                                        </p:tgtEl>
+                                        <p:attrNameLst>
+                                          <p:attrName>style.visibility</p:attrName>
+                                        </p:attrNameLst>
+                                      </p:cBhvr>
+                                      <p:to>
+                                        <p:strVal val="visible"/>
+                                      </p:to>
+                                    </p:set>
+                                  </p:childTnLst>
+                                </p:cTn>
+                              </p:par>
+                            </p:childTnLst>
+                          </p:cTn>
+                        </p:par>
+                      </p:childTnLst>
+                    </p:cTn>
+                  </p:par>
+                  <p:par>
+                    <p:cTn id="19" fill="hold">
+                      <p:stCondLst>
+                        <p:cond delay="indefinite"/>
+                      </p:stCondLst>
+                      <p:childTnLst>
+                        <p:par>
+                          <p:cTn id="20" fill="hold">
+                            <p:stCondLst>
+                              <p:cond delay="0"/>
+                            </p:stCondLst>
+                            <p:childTnLst>
+                              <p:par>
+                                <p:cTn id="21" presetID="1" presetClass="entr" presetSubtype="0" fill="hold" nodeType="clickEffect">
+                                  <p:stCondLst>
+                                    <p:cond delay="0"/>
+                                  </p:stCondLst>
+                                  <p:childTnLst>
+                                    <p:set>
+                                      <p:cBhvr>
+                                        <p:cTn id="22" dur="1" fill="hold">
+                                          <p:stCondLst>
+                                            <p:cond delay="0"/>
+                                          </p:stCondLst>
+                                        </p:cTn>
+                                        <p:tgtEl>
+                                          <p:spTgt spid="3">
+                                            <p:txEl>
+                                              <p:pRg st="4" end="4"/>
+                                            </p:txEl>
+                                          </p:spTgt>
+                                        </p:tgtEl>
+                                        <p:attrNameLst>
+                                          <p:attrName>style.visibility</p:attrName>
+                                        </p:attrNameLst>
+                                      </p:cBhvr>
+                                      <p:to>
+                                        <p:strVal val="visible"/>
+                                      </p:to>
+                                    </p:set>
+                                  </p:childTnLst>
+                                </p:cTn>
+                              </p:par>
+                            </p:childTnLst>
+                          </p:cTn>
+                        </p:par>
+                      </p:childTnLst>
+                    </p:cTn>
+                  </p:par>
+                </p:childTnLst>
+              </p:cTn>
+              <p:prevCondLst>
+                <p:cond evt="onPrev" delay="0">
+                  <p:tgtEl>
+                    <p:sldTgt/>
+                  </p:tgtEl>
+                </p:cond>
+              </p:prevCondLst>
+              <p:nextCondLst>
+                <p:cond evt="onNext" delay="0">
+                  <p:tgtEl>
+                    <p:sldTgt/>
+                  </p:tgtEl>
+                </p:cond>
+              </p:nextCondLst>
+            </p:seq>
+          </p:childTnLst>
+        </p:cTn>
+      </p:par>
+    </p:tnLst>
+  </p:timing>
 </p:sld>
 </file>
 
@@ -4205,10 +8511,10 @@
           <a:lstStyle/>
           <a:p>
             <a:r>
-              <a:rPr lang="en-US"/>
-              <a:t>High Score</a:t>
-            </a:r>
-            <a:endParaRPr lang="en-BE"/>
+              <a:rPr lang="en-US" dirty="0"/>
+              <a:t>Improvements</a:t>
+            </a:r>
+            <a:endParaRPr lang="en-BE" dirty="0"/>
           </a:p>
         </p:txBody>
       </p:sp>
@@ -4230,29 +8536,36 @@
         </p:nvSpPr>
         <p:spPr/>
         <p:txBody>
-          <a:bodyPr/>
+          <a:bodyPr>
+            <a:normAutofit/>
+          </a:bodyPr>
           <a:lstStyle/>
           <a:p>
-            <a:pPr marL="0" indent="0">
-              <a:buNone/>
-            </a:pPr>
-            <a:r>
-              <a:rPr lang="en-US">
-                <a:solidFill>
-                  <a:schemeClr val="bg1">
-                    <a:lumMod val="75000"/>
-                  </a:schemeClr>
-                </a:solidFill>
-              </a:rPr>
-              <a:t>Screen shot or list of highest scores</a:t>
-            </a:r>
-            <a:endParaRPr lang="en-BE">
-              <a:solidFill>
-                <a:schemeClr val="bg1">
-                  <a:lumMod val="75000"/>
-                </a:schemeClr>
-              </a:solidFill>
-            </a:endParaRPr>
+            <a:r>
+              <a:rPr lang="en-US" sz="2400" dirty="0"/>
+              <a:t>Blended steering for purge zones (again)</a:t>
+            </a:r>
+          </a:p>
+          <a:p>
+            <a:r>
+              <a:rPr lang="en-US" sz="2400" dirty="0"/>
+              <a:t>Item need values (distance, </a:t>
+            </a:r>
+            <a:r>
+              <a:rPr lang="en-US" sz="2400" dirty="0" err="1"/>
+              <a:t>itemValue</a:t>
+            </a:r>
+            <a:r>
+              <a:rPr lang="en-US" sz="2400" dirty="0"/>
+              <a:t>)</a:t>
+            </a:r>
+          </a:p>
+          <a:p>
+            <a:r>
+              <a:rPr lang="en-US" sz="2400" dirty="0"/>
+              <a:t>Explore around house (again) </a:t>
+            </a:r>
+            <a:endParaRPr lang="en-BE" sz="2400" dirty="0"/>
           </a:p>
         </p:txBody>
       </p:sp>
@@ -4266,6 +8579,183 @@
   <p:clrMapOvr>
     <a:masterClrMapping/>
   </p:clrMapOvr>
+  <p:timing>
+    <p:tnLst>
+      <p:par>
+        <p:cTn id="1" dur="indefinite" restart="never" nodeType="tmRoot">
+          <p:childTnLst>
+            <p:seq concurrent="1" nextAc="seek">
+              <p:cTn id="2" dur="indefinite" nodeType="mainSeq">
+                <p:childTnLst>
+                  <p:par>
+                    <p:cTn id="3" fill="hold">
+                      <p:stCondLst>
+                        <p:cond delay="indefinite"/>
+                      </p:stCondLst>
+                      <p:childTnLst>
+                        <p:par>
+                          <p:cTn id="4" fill="hold">
+                            <p:stCondLst>
+                              <p:cond delay="0"/>
+                            </p:stCondLst>
+                            <p:childTnLst>
+                              <p:par>
+                                <p:cTn id="5" presetID="1" presetClass="entr" presetSubtype="0" fill="hold" nodeType="clickEffect">
+                                  <p:stCondLst>
+                                    <p:cond delay="0"/>
+                                  </p:stCondLst>
+                                  <p:childTnLst>
+                                    <p:set>
+                                      <p:cBhvr>
+                                        <p:cTn id="6" dur="1" fill="hold">
+                                          <p:stCondLst>
+                                            <p:cond delay="0"/>
+                                          </p:stCondLst>
+                                        </p:cTn>
+                                        <p:tgtEl>
+                                          <p:spTgt spid="3">
+                                            <p:txEl>
+                                              <p:pRg st="0" end="0"/>
+                                            </p:txEl>
+                                          </p:spTgt>
+                                        </p:tgtEl>
+                                        <p:attrNameLst>
+                                          <p:attrName>style.visibility</p:attrName>
+                                        </p:attrNameLst>
+                                      </p:cBhvr>
+                                      <p:to>
+                                        <p:strVal val="visible"/>
+                                      </p:to>
+                                    </p:set>
+                                  </p:childTnLst>
+                                </p:cTn>
+                              </p:par>
+                            </p:childTnLst>
+                          </p:cTn>
+                        </p:par>
+                      </p:childTnLst>
+                    </p:cTn>
+                  </p:par>
+                  <p:par>
+                    <p:cTn id="7" fill="hold">
+                      <p:stCondLst>
+                        <p:cond delay="indefinite"/>
+                      </p:stCondLst>
+                      <p:childTnLst>
+                        <p:par>
+                          <p:cTn id="8" fill="hold">
+                            <p:stCondLst>
+                              <p:cond delay="0"/>
+                            </p:stCondLst>
+                            <p:childTnLst>
+                              <p:par>
+                                <p:cTn id="9" presetID="1" presetClass="entr" presetSubtype="0" fill="hold" nodeType="clickEffect">
+                                  <p:stCondLst>
+                                    <p:cond delay="0"/>
+                                  </p:stCondLst>
+                                  <p:childTnLst>
+                                    <p:set>
+                                      <p:cBhvr>
+                                        <p:cTn id="10" dur="1" fill="hold">
+                                          <p:stCondLst>
+                                            <p:cond delay="0"/>
+                                          </p:stCondLst>
+                                        </p:cTn>
+                                        <p:tgtEl>
+                                          <p:spTgt spid="3">
+                                            <p:txEl>
+                                              <p:pRg st="1" end="1"/>
+                                            </p:txEl>
+                                          </p:spTgt>
+                                        </p:tgtEl>
+                                        <p:attrNameLst>
+                                          <p:attrName>style.visibility</p:attrName>
+                                        </p:attrNameLst>
+                                      </p:cBhvr>
+                                      <p:to>
+                                        <p:strVal val="visible"/>
+                                      </p:to>
+                                    </p:set>
+                                  </p:childTnLst>
+                                </p:cTn>
+                              </p:par>
+                            </p:childTnLst>
+                          </p:cTn>
+                        </p:par>
+                      </p:childTnLst>
+                    </p:cTn>
+                  </p:par>
+                  <p:par>
+                    <p:cTn id="11" fill="hold">
+                      <p:stCondLst>
+                        <p:cond delay="indefinite"/>
+                      </p:stCondLst>
+                      <p:childTnLst>
+                        <p:par>
+                          <p:cTn id="12" fill="hold">
+                            <p:stCondLst>
+                              <p:cond delay="0"/>
+                            </p:stCondLst>
+                            <p:childTnLst>
+                              <p:par>
+                                <p:cTn id="13" presetID="1" presetClass="entr" presetSubtype="0" fill="hold" nodeType="clickEffect">
+                                  <p:stCondLst>
+                                    <p:cond delay="0"/>
+                                  </p:stCondLst>
+                                  <p:childTnLst>
+                                    <p:set>
+                                      <p:cBhvr>
+                                        <p:cTn id="14" dur="1" fill="hold">
+                                          <p:stCondLst>
+                                            <p:cond delay="0"/>
+                                          </p:stCondLst>
+                                        </p:cTn>
+                                        <p:tgtEl>
+                                          <p:spTgt spid="3">
+                                            <p:txEl>
+                                              <p:pRg st="2" end="2"/>
+                                            </p:txEl>
+                                          </p:spTgt>
+                                        </p:tgtEl>
+                                        <p:attrNameLst>
+                                          <p:attrName>style.visibility</p:attrName>
+                                        </p:attrNameLst>
+                                      </p:cBhvr>
+                                      <p:to>
+                                        <p:strVal val="visible"/>
+                                      </p:to>
+                                    </p:set>
+                                  </p:childTnLst>
+                                </p:cTn>
+                              </p:par>
+                            </p:childTnLst>
+                          </p:cTn>
+                        </p:par>
+                      </p:childTnLst>
+                    </p:cTn>
+                  </p:par>
+                </p:childTnLst>
+              </p:cTn>
+              <p:prevCondLst>
+                <p:cond evt="onPrev" delay="0">
+                  <p:tgtEl>
+                    <p:sldTgt/>
+                  </p:tgtEl>
+                </p:cond>
+              </p:prevCondLst>
+              <p:nextCondLst>
+                <p:cond evt="onNext" delay="0">
+                  <p:tgtEl>
+                    <p:sldTgt/>
+                  </p:tgtEl>
+                </p:cond>
+              </p:nextCondLst>
+            </p:seq>
+          </p:childTnLst>
+        </p:cTn>
+      </p:par>
+    </p:tnLst>
+  </p:timing>
 </p:sld>
 </file>
 
@@ -4574,21 +9064,6 @@
 </file>
 
 <file path=customXml/item2.xml><?xml version="1.0" encoding="utf-8"?>
-<p:properties xmlns:p="http://schemas.microsoft.com/office/2006/metadata/properties" xmlns:xsi="http://www.w3.org/2001/XMLSchema-instance" xmlns:pc="http://schemas.microsoft.com/office/infopath/2007/PartnerControls">
-  <documentManagement>
-    <IconOverlay xmlns="http://schemas.microsoft.com/sharepoint/v4" xsi:nil="true"/>
-    <TaxCatchAll xmlns="128482ec-0431-40d5-ab26-89ea2a4f3ccd" xsi:nil="true"/>
-    <m99485b88215436a82099f8287cba0b0 xmlns="128482ec-0431-40d5-ab26-89ea2a4f3ccd">
-      <Terms xmlns="http://schemas.microsoft.com/office/infopath/2007/PartnerControls"/>
-    </m99485b88215436a82099f8287cba0b0>
-    <lcf76f155ced4ddcb4097134ff3c332f xmlns="60eb0cf4-ae2a-4762-800a-cb593b869ecb">
-      <Terms xmlns="http://schemas.microsoft.com/office/infopath/2007/PartnerControls"/>
-    </lcf76f155ced4ddcb4097134ff3c332f>
-  </documentManagement>
-</p:properties>
-</file>
-
-<file path=customXml/item3.xml><?xml version="1.0" encoding="utf-8"?>
 <ct:contentTypeSchema xmlns:ct="http://schemas.microsoft.com/office/2006/metadata/contentType" xmlns:ma="http://schemas.microsoft.com/office/2006/metadata/properties/metaAttributes" ct:_="" ma:_="" ma:contentTypeName="Document" ma:contentTypeID="0x010100723942CCEB3A674D8F1F6472CCEFB38E" ma:contentTypeVersion="11" ma:contentTypeDescription="Create a new document." ma:contentTypeScope="" ma:versionID="e4de40d148e029d40e3aaddc8bf68a5e">
   <xsd:schema xmlns:xsd="http://www.w3.org/2001/XMLSchema" xmlns:xs="http://www.w3.org/2001/XMLSchema" xmlns:p="http://schemas.microsoft.com/office/2006/metadata/properties" xmlns:ns2="128482ec-0431-40d5-ab26-89ea2a4f3ccd" xmlns:ns3="60eb0cf4-ae2a-4762-800a-cb593b869ecb" xmlns:ns4="http://schemas.microsoft.com/sharepoint/v4" xmlns:ns5="a2e691a9-fcfc-4d85-a390-1894fe98bd9e" targetNamespace="http://schemas.microsoft.com/office/2006/metadata/properties" ma:root="true" ma:fieldsID="fce8e8bd091658f3fe51b22d57dec109" ns2:_="" ns3:_="" ns4:_="" ns5:_="">
     <xsd:import namespace="128482ec-0431-40d5-ab26-89ea2a4f3ccd"/>
@@ -4861,6 +9336,21 @@
 </ct:contentTypeSchema>
 </file>
 
+<file path=customXml/item3.xml><?xml version="1.0" encoding="utf-8"?>
+<p:properties xmlns:p="http://schemas.microsoft.com/office/2006/metadata/properties" xmlns:xsi="http://www.w3.org/2001/XMLSchema-instance" xmlns:pc="http://schemas.microsoft.com/office/infopath/2007/PartnerControls">
+  <documentManagement>
+    <IconOverlay xmlns="http://schemas.microsoft.com/sharepoint/v4" xsi:nil="true"/>
+    <TaxCatchAll xmlns="128482ec-0431-40d5-ab26-89ea2a4f3ccd" xsi:nil="true"/>
+    <m99485b88215436a82099f8287cba0b0 xmlns="128482ec-0431-40d5-ab26-89ea2a4f3ccd">
+      <Terms xmlns="http://schemas.microsoft.com/office/infopath/2007/PartnerControls"/>
+    </m99485b88215436a82099f8287cba0b0>
+    <lcf76f155ced4ddcb4097134ff3c332f xmlns="60eb0cf4-ae2a-4762-800a-cb593b869ecb">
+      <Terms xmlns="http://schemas.microsoft.com/office/infopath/2007/PartnerControls"/>
+    </lcf76f155ced4ddcb4097134ff3c332f>
+  </documentManagement>
+</p:properties>
+</file>
+
 <file path=customXml/itemProps1.xml><?xml version="1.0" encoding="utf-8"?>
 <ds:datastoreItem xmlns:ds="http://schemas.openxmlformats.org/officeDocument/2006/customXml" ds:itemID="{AF8EC6D1-CB19-4400-AD0A-0C75CD884AEA}">
   <ds:schemaRefs>
@@ -4870,18 +9360,6 @@
 </file>
 
 <file path=customXml/itemProps2.xml><?xml version="1.0" encoding="utf-8"?>
-<ds:datastoreItem xmlns:ds="http://schemas.openxmlformats.org/officeDocument/2006/customXml" ds:itemID="{B743389A-7EE0-4951-8919-E91DD69E3687}">
-  <ds:schemaRefs>
-    <ds:schemaRef ds:uri="128482ec-0431-40d5-ab26-89ea2a4f3ccd"/>
-    <ds:schemaRef ds:uri="http://schemas.microsoft.com/office/2006/metadata/properties"/>
-    <ds:schemaRef ds:uri="http://schemas.microsoft.com/office/infopath/2007/PartnerControls"/>
-    <ds:schemaRef ds:uri="http://schemas.microsoft.com/sharepoint/v4"/>
-    <ds:schemaRef ds:uri="60eb0cf4-ae2a-4762-800a-cb593b869ecb"/>
-  </ds:schemaRefs>
-</ds:datastoreItem>
-</file>
-
-<file path=customXml/itemProps3.xml><?xml version="1.0" encoding="utf-8"?>
 <ds:datastoreItem xmlns:ds="http://schemas.openxmlformats.org/officeDocument/2006/customXml" ds:itemID="{D7B8C5DE-3345-4025-A942-C5AA68E55545}">
   <ds:schemaRefs>
     <ds:schemaRef ds:uri="http://schemas.microsoft.com/office/2006/metadata/contentType"/>
@@ -4900,4 +9378,16 @@
     <ds:schemaRef ds:uri="http://schemas.microsoft.com/internal/obd"/>
   </ds:schemaRefs>
 </ds:datastoreItem>
+</file>
+
+<file path=customXml/itemProps3.xml><?xml version="1.0" encoding="utf-8"?>
+<ds:datastoreItem xmlns:ds="http://schemas.openxmlformats.org/officeDocument/2006/customXml" ds:itemID="{B743389A-7EE0-4951-8919-E91DD69E3687}">
+  <ds:schemaRefs>
+    <ds:schemaRef ds:uri="128482ec-0431-40d5-ab26-89ea2a4f3ccd"/>
+    <ds:schemaRef ds:uri="http://schemas.microsoft.com/office/2006/metadata/properties"/>
+    <ds:schemaRef ds:uri="http://schemas.microsoft.com/office/infopath/2007/PartnerControls"/>
+    <ds:schemaRef ds:uri="http://schemas.microsoft.com/sharepoint/v4"/>
+    <ds:schemaRef ds:uri="60eb0cf4-ae2a-4762-800a-cb593b869ecb"/>
+  </ds:schemaRefs>
+</ds:datastoreItem>
 </file>